--- a/sjoskolan/vecka-42/aktuell/v42_01_Elektriska_risker_elev.pptx
+++ b/sjoskolan/vecka-42/aktuell/v42_01_Elektriska_risker_elev.pptx
@@ -3512,6 +3512,10 @@
             <a:noFill/>
           </a:ln>
         </p:spPr>
+        <p:txBody xmlns:a="http://schemas.openxmlformats.org/drawingml/2006/main">
+          <a:bodyPr/>
+          <a:p/>
+        </p:txBody>
       </p:sp>
       <p:sp>
         <p:nvSpPr>
@@ -4348,7 +4352,7 @@
                 <a:ea typeface="Calibri"/>
                 <a:cs typeface="Calibri"/>
               </a:rPr>
-              <a:t>Redovisa din beräkning eller motivera ditt beslut.</a:t>
+              <a:t>Motivera ditt beslut.</a:t>
             </a:r>
           </a:p>
         </p:txBody>
@@ -5072,7 +5076,7 @@
                 <a:ea typeface="Calibri"/>
                 <a:cs typeface="Calibri"/>
               </a:rPr>
-              <a:t>Redovisa din beräkning eller motivera ditt beslut.</a:t>
+              <a:t>Motivera ditt beslut.</a:t>
             </a:r>
           </a:p>
         </p:txBody>
@@ -5255,7 +5259,7 @@
         <p:spPr>
           <a:xfrm xmlns:a="http://schemas.openxmlformats.org/drawingml/2006/main">
             <a:off x="762000" y="1638300"/>
-            <a:ext cx="7620000" cy="876300"/>
+            <a:ext cx="3977639" cy="876300"/>
           </a:xfrm>
           <a:prstGeom xmlns:a="http://schemas.openxmlformats.org/drawingml/2006/main" prst="rect">
             <a:avLst/>
@@ -5290,7 +5294,95 @@
                 <a:ea typeface="Calibri"/>
                 <a:cs typeface="Calibri"/>
               </a:rPr>
-              <a:t>Uberöring = |VA − VB|</a:t>
+              <a:t>U</a:t>
+            </a:r>
+            <a:r>
+              <a:rPr sz="2400" b="1" baseline="-25000">
+                <a:solidFill>
+                  <a:srgbClr val="064F91"/>
+                </a:solidFill>
+                <a:latin typeface="Calibri"/>
+                <a:ea typeface="Calibri"/>
+                <a:cs typeface="Calibri"/>
+              </a:rPr>
+              <a:t>beröring</a:t>
+            </a:r>
+            <a:r>
+              <a:rPr sz="2400" b="1">
+                <a:solidFill>
+                  <a:srgbClr val="064F91"/>
+                </a:solidFill>
+                <a:latin typeface="Calibri"/>
+                <a:ea typeface="Calibri"/>
+                <a:cs typeface="Calibri"/>
+              </a:rPr>
+              <a:t> = |</a:t>
+            </a:r>
+            <a:r>
+              <a:rPr sz="2400" b="1">
+                <a:solidFill>
+                  <a:srgbClr val="064F91"/>
+                </a:solidFill>
+                <a:latin typeface="Calibri"/>
+                <a:ea typeface="Calibri"/>
+                <a:cs typeface="Calibri"/>
+              </a:rPr>
+              <a:t>V</a:t>
+            </a:r>
+            <a:r>
+              <a:rPr sz="2400" b="1" baseline="-25000">
+                <a:solidFill>
+                  <a:srgbClr val="064F91"/>
+                </a:solidFill>
+                <a:latin typeface="Calibri"/>
+                <a:ea typeface="Calibri"/>
+                <a:cs typeface="Calibri"/>
+              </a:rPr>
+              <a:t>A</a:t>
+            </a:r>
+            <a:r>
+              <a:rPr sz="2400" b="1">
+                <a:solidFill>
+                  <a:srgbClr val="064F91"/>
+                </a:solidFill>
+                <a:latin typeface="Calibri"/>
+                <a:ea typeface="Calibri"/>
+                <a:cs typeface="Calibri"/>
+              </a:rPr>
+              <a:t> − </a:t>
+            </a:r>
+            <a:r>
+              <a:rPr sz="2400" b="1">
+                <a:solidFill>
+                  <a:srgbClr val="064F91"/>
+                </a:solidFill>
+                <a:latin typeface="Calibri"/>
+                <a:ea typeface="Calibri"/>
+                <a:cs typeface="Calibri"/>
+              </a:rPr>
+              <a:t>V</a:t>
+            </a:r>
+            <a:r>
+              <a:rPr sz="2400" b="1" baseline="-25000">
+                <a:solidFill>
+                  <a:srgbClr val="064F91"/>
+                </a:solidFill>
+                <a:latin typeface="Calibri"/>
+                <a:ea typeface="Calibri"/>
+                <a:cs typeface="Calibri"/>
+              </a:rPr>
+              <a:t>B</a:t>
+            </a:r>
+            <a:r>
+              <a:rPr sz="2400" b="1">
+                <a:solidFill>
+                  <a:srgbClr val="064F91"/>
+                </a:solidFill>
+                <a:latin typeface="Calibri"/>
+                <a:ea typeface="Calibri"/>
+                <a:cs typeface="Calibri"/>
+              </a:rPr>
+              <a:t>|</a:t>
             </a:r>
           </a:p>
         </p:txBody>
@@ -5312,7 +5404,7 @@
         <p:spPr>
           <a:xfrm xmlns:a="http://schemas.openxmlformats.org/drawingml/2006/main">
             <a:off x="762000" y="2667000"/>
-            <a:ext cx="7620000" cy="952500"/>
+            <a:ext cx="3977639" cy="952500"/>
           </a:xfrm>
           <a:prstGeom xmlns:a="http://schemas.openxmlformats.org/drawingml/2006/main" prst="rect">
             <a:avLst/>
@@ -5339,15 +5431,70 @@
               </a:defRPr>
             </a:pPr>
             <a:r>
-              <a:rPr sz="2100" b="0">
-                <a:solidFill>
-                  <a:srgbClr val="111111"/>
-                </a:solidFill>
-                <a:latin typeface="Calibri"/>
-                <a:ea typeface="Calibri"/>
-                <a:cs typeface="Calibri"/>
-              </a:rPr>
-              <a:t>VA och VB är potentialerna hos två punkter som kan beröras samtidigt.</a:t>
+              <a:rPr sz="2050" b="0">
+                <a:solidFill>
+                  <a:srgbClr val="111111"/>
+                </a:solidFill>
+                <a:latin typeface="Calibri"/>
+                <a:ea typeface="Calibri"/>
+                <a:cs typeface="Calibri"/>
+              </a:rPr>
+              <a:t>V</a:t>
+            </a:r>
+            <a:r>
+              <a:rPr sz="2050" b="0" baseline="-25000">
+                <a:solidFill>
+                  <a:srgbClr val="111111"/>
+                </a:solidFill>
+                <a:latin typeface="Calibri"/>
+                <a:ea typeface="Calibri"/>
+                <a:cs typeface="Calibri"/>
+              </a:rPr>
+              <a:t>A</a:t>
+            </a:r>
+            <a:r>
+              <a:rPr sz="2050" b="0">
+                <a:solidFill>
+                  <a:srgbClr val="111111"/>
+                </a:solidFill>
+                <a:latin typeface="Calibri"/>
+                <a:ea typeface="Calibri"/>
+                <a:cs typeface="Calibri"/>
+              </a:rPr>
+              <a:t> och </a:t>
+            </a:r>
+            <a:r>
+              <a:rPr sz="2050" b="0">
+                <a:solidFill>
+                  <a:srgbClr val="111111"/>
+                </a:solidFill>
+                <a:latin typeface="Calibri"/>
+                <a:ea typeface="Calibri"/>
+                <a:cs typeface="Calibri"/>
+              </a:rPr>
+              <a:t>V</a:t>
+            </a:r>
+            <a:r>
+              <a:rPr sz="2050" b="0" baseline="-25000">
+                <a:solidFill>
+                  <a:srgbClr val="111111"/>
+                </a:solidFill>
+                <a:latin typeface="Calibri"/>
+                <a:ea typeface="Calibri"/>
+                <a:cs typeface="Calibri"/>
+              </a:rPr>
+              <a:t>B</a:t>
+            </a:r>
+            <a:r>
+              <a:rPr sz="2050" b="0">
+                <a:solidFill>
+                  <a:srgbClr val="111111"/>
+                </a:solidFill>
+                <a:latin typeface="Calibri"/>
+                <a:ea typeface="Calibri"/>
+                <a:cs typeface="Calibri"/>
+              </a:rPr>
+              <a:t> är potentialerna hos två punkter som kan beröras samtidigt.</a:t>
             </a:r>
           </a:p>
         </p:txBody>
@@ -5369,7 +5516,7 @@
         <p:spPr>
           <a:xfrm xmlns:a="http://schemas.openxmlformats.org/drawingml/2006/main">
             <a:off x="762000" y="3800475"/>
-            <a:ext cx="7620000" cy="981075"/>
+            <a:ext cx="3977639" cy="981075"/>
           </a:xfrm>
           <a:prstGeom xmlns:a="http://schemas.openxmlformats.org/drawingml/2006/main" prst="rect">
             <a:avLst/>
@@ -5396,15 +5543,15 @@
               </a:defRPr>
             </a:pPr>
             <a:r>
-              <a:rPr sz="2025" b="0">
-                <a:solidFill>
-                  <a:srgbClr val="111111"/>
-                </a:solidFill>
-                <a:latin typeface="Calibri"/>
-                <a:ea typeface="Calibri"/>
-                <a:cs typeface="Calibri"/>
-              </a:rPr>
-              <a:t>Förutsättningar: Hölje och ledande struktur skiljer 60 V i potential. Båda kan beröras samtidigt.</a:t>
+              <a:rPr sz="1700" b="0">
+                <a:solidFill>
+                  <a:srgbClr val="111111"/>
+                </a:solidFill>
+                <a:latin typeface="Calibri"/>
+                <a:ea typeface="Calibri"/>
+                <a:cs typeface="Calibri"/>
+              </a:rPr>
+              <a:t>Förutsättningar: Hölje och ledande struktur skiljer 60 V i potential. Båda kan beröras samtidigt.</a:t>
             </a:r>
           </a:p>
         </p:txBody>
@@ -5426,7 +5573,7 @@
         <p:spPr>
           <a:xfrm xmlns:a="http://schemas.openxmlformats.org/drawingml/2006/main">
             <a:off x="762000" y="5010150"/>
-            <a:ext cx="7620000" cy="990600"/>
+            <a:ext cx="3977639" cy="990600"/>
           </a:xfrm>
           <a:prstGeom xmlns:a="http://schemas.openxmlformats.org/drawingml/2006/main" prst="rect">
             <a:avLst/>
@@ -5453,7 +5600,7 @@
               </a:defRPr>
             </a:pPr>
             <a:r>
-              <a:rPr sz="2025" b="0">
+              <a:rPr sz="1600" b="0">
                 <a:solidFill>
                   <a:srgbClr val="111111"/>
                 </a:solidFill>
@@ -5523,6 +5670,30 @@
           </a:p>
         </p:txBody>
       </p:sp>
+      <p:pic xmlns:a="http://schemas.openxmlformats.org/drawingml/2006/main" xmlns:r="http://schemas.openxmlformats.org/officeDocument/2006/relationships">
+        <p:nvPicPr>
+          <p:cNvPr id="16" name="Figur: En person rör samtidigt punkt A på ett h" descr="En person rör samtidigt punkt A på ett hölje och punkt B på en ledande struktur; höljet ligger 60 V över strukturen, beröringsspänningen okänd"/>
+          <p:cNvPicPr>
+            <a:picLocks noChangeAspect="1"/>
+          </p:cNvPicPr>
+          <p:nvPr/>
+        </p:nvPicPr>
+        <p:blipFill>
+          <a:blip r:embed="rId3"/>
+          <a:stretch>
+            <a:fillRect/>
+          </a:stretch>
+        </p:blipFill>
+        <p:spPr>
+          <a:xfrm>
+            <a:off x="4892040" y="1645920"/>
+            <a:ext cx="3886200" cy="3252383"/>
+          </a:xfrm>
+          <a:prstGeom prst="rect">
+            <a:avLst/>
+          </a:prstGeom>
+        </p:spPr>
+      </p:pic>
     </p:spTree>
     <p:extLst>
       <p:ext uri="{BB962C8B-B14F-4D97-AF65-F5344CB8AC3E}">
@@ -5796,7 +5967,7 @@
                 <a:ea typeface="Calibri"/>
                 <a:cs typeface="Calibri"/>
               </a:rPr>
-              <a:t>Redovisa din beräkning eller motivera ditt beslut.</a:t>
+              <a:t>Motivera ditt beslut.</a:t>
             </a:r>
           </a:p>
         </p:txBody>
@@ -5979,7 +6150,7 @@
         <p:spPr>
           <a:xfrm xmlns:a="http://schemas.openxmlformats.org/drawingml/2006/main">
             <a:off x="762000" y="1638300"/>
-            <a:ext cx="7620000" cy="876300"/>
+            <a:ext cx="3977639" cy="876300"/>
           </a:xfrm>
           <a:prstGeom xmlns:a="http://schemas.openxmlformats.org/drawingml/2006/main" prst="rect">
             <a:avLst/>
@@ -6014,7 +6185,7 @@
                 <a:ea typeface="Calibri"/>
                 <a:cs typeface="Calibri"/>
               </a:rPr>
-              <a:t>I = U/R     I[mA] = 1 000 · I[A]</a:t>
+              <a:t>I = U/R     I[mA] = 1 000 · I[A]</a:t>
             </a:r>
           </a:p>
         </p:txBody>
@@ -6036,7 +6207,7 @@
         <p:spPr>
           <a:xfrm xmlns:a="http://schemas.openxmlformats.org/drawingml/2006/main">
             <a:off x="762000" y="2667000"/>
-            <a:ext cx="7620000" cy="952500"/>
+            <a:ext cx="3977639" cy="952500"/>
           </a:xfrm>
           <a:prstGeom xmlns:a="http://schemas.openxmlformats.org/drawingml/2006/main" prst="rect">
             <a:avLst/>
@@ -6063,7 +6234,7 @@
               </a:defRPr>
             </a:pPr>
             <a:r>
-              <a:rPr sz="2100" b="0">
+              <a:rPr sz="1850" b="0">
                 <a:solidFill>
                   <a:srgbClr val="111111"/>
                 </a:solidFill>
@@ -6093,7 +6264,7 @@
         <p:spPr>
           <a:xfrm xmlns:a="http://schemas.openxmlformats.org/drawingml/2006/main">
             <a:off x="762000" y="3800475"/>
-            <a:ext cx="7620000" cy="981075"/>
+            <a:ext cx="3977639" cy="981075"/>
           </a:xfrm>
           <a:prstGeom xmlns:a="http://schemas.openxmlformats.org/drawingml/2006/main" prst="rect">
             <a:avLst/>
@@ -6120,15 +6291,15 @@
               </a:defRPr>
             </a:pPr>
             <a:r>
-              <a:rPr sz="2025" b="0">
-                <a:solidFill>
-                  <a:srgbClr val="111111"/>
-                </a:solidFill>
-                <a:latin typeface="Calibri"/>
-                <a:ea typeface="Calibri"/>
-                <a:cs typeface="Calibri"/>
-              </a:rPr>
-              <a:t>Förutsättningar: Ren resistiv räknemodell: U = 24 V och R = 2 000 Ω. Värdet på R är ett antagande.</a:t>
+              <a:rPr sz="1700" b="0">
+                <a:solidFill>
+                  <a:srgbClr val="111111"/>
+                </a:solidFill>
+                <a:latin typeface="Calibri"/>
+                <a:ea typeface="Calibri"/>
+                <a:cs typeface="Calibri"/>
+              </a:rPr>
+              <a:t>Förutsättningar: Ren resistiv räknemodell: U = 24 V och R = 2 000 Ω. Värdet på R är ett antagande.</a:t>
             </a:r>
           </a:p>
         </p:txBody>
@@ -6150,7 +6321,7 @@
         <p:spPr>
           <a:xfrm xmlns:a="http://schemas.openxmlformats.org/drawingml/2006/main">
             <a:off x="762000" y="5010150"/>
-            <a:ext cx="7620000" cy="990600"/>
+            <a:ext cx="3977639" cy="990600"/>
           </a:xfrm>
           <a:prstGeom xmlns:a="http://schemas.openxmlformats.org/drawingml/2006/main" prst="rect">
             <a:avLst/>
@@ -6177,7 +6348,7 @@
               </a:defRPr>
             </a:pPr>
             <a:r>
-              <a:rPr sz="2025" b="0">
+              <a:rPr sz="1600" b="0">
                 <a:solidFill>
                   <a:srgbClr val="111111"/>
                 </a:solidFill>
@@ -6247,6 +6418,30 @@
           </a:p>
         </p:txBody>
       </p:sp>
+      <p:pic xmlns:a="http://schemas.openxmlformats.org/drawingml/2006/main" xmlns:r="http://schemas.openxmlformats.org/officeDocument/2006/relationships">
+        <p:nvPicPr>
+          <p:cNvPr id="16" name="Figur: Räknemodell: 24 V likspänning över en an" descr="Räknemodell: 24 V likspänning över en antagen resistans på 2 000 ohm; strömmen okänd"/>
+          <p:cNvPicPr>
+            <a:picLocks noChangeAspect="1"/>
+          </p:cNvPicPr>
+          <p:nvPr/>
+        </p:nvPicPr>
+        <p:blipFill>
+          <a:blip r:embed="rId3"/>
+          <a:stretch>
+            <a:fillRect/>
+          </a:stretch>
+        </p:blipFill>
+        <p:spPr>
+          <a:xfrm>
+            <a:off x="4892040" y="1645920"/>
+            <a:ext cx="3886200" cy="2890202"/>
+          </a:xfrm>
+          <a:prstGeom prst="rect">
+            <a:avLst/>
+          </a:prstGeom>
+        </p:spPr>
+      </p:pic>
     </p:spTree>
     <p:extLst>
       <p:ext uri="{BB962C8B-B14F-4D97-AF65-F5344CB8AC3E}">
@@ -6703,7 +6898,7 @@
         <p:spPr>
           <a:xfrm xmlns:a="http://schemas.openxmlformats.org/drawingml/2006/main">
             <a:off x="762000" y="1638300"/>
-            <a:ext cx="7620000" cy="876300"/>
+            <a:ext cx="3977639" cy="876300"/>
           </a:xfrm>
           <a:prstGeom xmlns:a="http://schemas.openxmlformats.org/drawingml/2006/main" prst="rect">
             <a:avLst/>
@@ -6730,7 +6925,7 @@
               </a:defRPr>
             </a:pPr>
             <a:r>
-              <a:rPr sz="2400" b="1">
+              <a:rPr sz="2200" b="1">
                 <a:solidFill>
                   <a:srgbClr val="064F91"/>
                 </a:solidFill>
@@ -6760,7 +6955,7 @@
         <p:spPr>
           <a:xfrm xmlns:a="http://schemas.openxmlformats.org/drawingml/2006/main">
             <a:off x="762000" y="2667000"/>
-            <a:ext cx="7620000" cy="952500"/>
+            <a:ext cx="3977639" cy="952500"/>
           </a:xfrm>
           <a:prstGeom xmlns:a="http://schemas.openxmlformats.org/drawingml/2006/main" prst="rect">
             <a:avLst/>
@@ -6787,7 +6982,7 @@
               </a:defRPr>
             </a:pPr>
             <a:r>
-              <a:rPr sz="2100" b="0">
+              <a:rPr sz="1850" b="0">
                 <a:solidFill>
                   <a:srgbClr val="111111"/>
                 </a:solidFill>
@@ -6817,7 +7012,7 @@
         <p:spPr>
           <a:xfrm xmlns:a="http://schemas.openxmlformats.org/drawingml/2006/main">
             <a:off x="762000" y="3800475"/>
-            <a:ext cx="7620000" cy="981075"/>
+            <a:ext cx="3977639" cy="981075"/>
           </a:xfrm>
           <a:prstGeom xmlns:a="http://schemas.openxmlformats.org/drawingml/2006/main" prst="rect">
             <a:avLst/>
@@ -6844,7 +7039,7 @@
               </a:defRPr>
             </a:pPr>
             <a:r>
-              <a:rPr sz="2025" b="0">
+              <a:rPr sz="1600" b="0">
                 <a:solidFill>
                   <a:srgbClr val="111111"/>
                 </a:solidFill>
@@ -6874,7 +7069,7 @@
         <p:spPr>
           <a:xfrm xmlns:a="http://schemas.openxmlformats.org/drawingml/2006/main">
             <a:off x="762000" y="5010150"/>
-            <a:ext cx="7620000" cy="990600"/>
+            <a:ext cx="3977639" cy="990600"/>
           </a:xfrm>
           <a:prstGeom xmlns:a="http://schemas.openxmlformats.org/drawingml/2006/main" prst="rect">
             <a:avLst/>
@@ -6901,7 +7096,7 @@
               </a:defRPr>
             </a:pPr>
             <a:r>
-              <a:rPr sz="2025" b="0">
+              <a:rPr sz="1600" b="0">
                 <a:solidFill>
                   <a:srgbClr val="111111"/>
                 </a:solidFill>
@@ -6971,6 +7166,30 @@
           </a:p>
         </p:txBody>
       </p:sp>
+      <p:pic xmlns:a="http://schemas.openxmlformats.org/drawingml/2006/main" xmlns:r="http://schemas.openxmlformats.org/officeDocument/2006/relationships">
+        <p:nvPicPr>
+          <p:cNvPr id="16" name="Figur: Kraftkrets med frånskiljare i okänt läge" descr="Kraftkrets med frånskiljare i okänt läge, kontaktor K1 och motor; styrkretsen med STOPP bruten och en släckt panel. Frågan är om det är spänningslöst"/>
+          <p:cNvPicPr>
+            <a:picLocks noChangeAspect="1"/>
+          </p:cNvPicPr>
+          <p:nvPr/>
+        </p:nvPicPr>
+        <p:blipFill>
+          <a:blip r:embed="rId3"/>
+          <a:stretch>
+            <a:fillRect/>
+          </a:stretch>
+        </p:blipFill>
+        <p:spPr>
+          <a:xfrm>
+            <a:off x="4892040" y="1645920"/>
+            <a:ext cx="3886200" cy="3252383"/>
+          </a:xfrm>
+          <a:prstGeom prst="rect">
+            <a:avLst/>
+          </a:prstGeom>
+        </p:spPr>
+      </p:pic>
     </p:spTree>
     <p:extLst>
       <p:ext uri="{BB962C8B-B14F-4D97-AF65-F5344CB8AC3E}">
@@ -7244,7 +7463,7 @@
                 <a:ea typeface="Calibri"/>
                 <a:cs typeface="Calibri"/>
               </a:rPr>
-              <a:t>Redovisa din beräkning eller motivera ditt beslut.</a:t>
+              <a:t>Motivera ditt beslut.</a:t>
             </a:r>
           </a:p>
         </p:txBody>
@@ -8172,7 +8391,7 @@
         <p:spPr>
           <a:xfrm xmlns:a="http://schemas.openxmlformats.org/drawingml/2006/main">
             <a:off x="762000" y="1619250"/>
-            <a:ext cx="7620000" cy="1466850"/>
+            <a:ext cx="3977639" cy="1466850"/>
           </a:xfrm>
           <a:prstGeom xmlns:a="http://schemas.openxmlformats.org/drawingml/2006/main" prst="rect">
             <a:avLst/>
@@ -8200,7 +8419,7 @@
               </a:defRPr>
             </a:pPr>
             <a:r>
-              <a:rPr sz="2400" b="0">
+              <a:rPr sz="1800" b="0">
                 <a:solidFill>
                   <a:srgbClr val="111111"/>
                 </a:solidFill>
@@ -8224,7 +8443,7 @@
               </a:defRPr>
             </a:pPr>
             <a:r>
-              <a:rPr sz="2400" b="0">
+              <a:rPr sz="1800" b="0">
                 <a:solidFill>
                   <a:srgbClr val="111111"/>
                 </a:solidFill>
@@ -8254,7 +8473,7 @@
         <p:spPr>
           <a:xfrm xmlns:a="http://schemas.openxmlformats.org/drawingml/2006/main">
             <a:off x="762000" y="3200400"/>
-            <a:ext cx="7620000" cy="838200"/>
+            <a:ext cx="3977639" cy="838200"/>
           </a:xfrm>
           <a:prstGeom xmlns:a="http://schemas.openxmlformats.org/drawingml/2006/main" prst="rect">
             <a:avLst/>
@@ -8282,7 +8501,7 @@
               </a:defRPr>
             </a:pPr>
             <a:r>
-              <a:rPr sz="2925" b="1">
+              <a:rPr sz="2500" b="1">
                 <a:solidFill>
                   <a:srgbClr val="064F91"/>
                 </a:solidFill>
@@ -8312,7 +8531,7 @@
         <p:spPr>
           <a:xfrm xmlns:a="http://schemas.openxmlformats.org/drawingml/2006/main">
             <a:off x="762000" y="4429125"/>
-            <a:ext cx="7620000" cy="1352550"/>
+            <a:ext cx="3977639" cy="1352550"/>
           </a:xfrm>
           <a:prstGeom xmlns:a="http://schemas.openxmlformats.org/drawingml/2006/main" prst="rect">
             <a:avLst/>
@@ -8340,7 +8559,7 @@
               </a:defRPr>
             </a:pPr>
             <a:r>
-              <a:rPr sz="2250" b="0">
+              <a:rPr sz="2000" b="0">
                 <a:solidFill>
                   <a:srgbClr val="111111"/>
                 </a:solidFill>
@@ -8364,7 +8583,7 @@
               </a:defRPr>
             </a:pPr>
             <a:r>
-              <a:rPr sz="2250" b="0">
+              <a:rPr sz="2000" b="0">
                 <a:solidFill>
                   <a:srgbClr val="111111"/>
                 </a:solidFill>
@@ -8435,6 +8654,30 @@
           </a:p>
         </p:txBody>
       </p:sp>
+      <p:pic xmlns:a="http://schemas.openxmlformats.org/drawingml/2006/main" xmlns:r="http://schemas.openxmlformats.org/officeDocument/2006/relationships">
+        <p:nvPicPr>
+          <p:cNvPr id="9" name="Figur: Fördelning som kan matas från generator," descr="Fördelning som kan matas från generator, nödgenerator med autostart, landanslutning, batteri och UPS"/>
+          <p:cNvPicPr>
+            <a:picLocks noChangeAspect="1"/>
+          </p:cNvPicPr>
+          <p:nvPr/>
+        </p:nvPicPr>
+        <p:blipFill>
+          <a:blip r:embed="rId3"/>
+          <a:stretch>
+            <a:fillRect/>
+          </a:stretch>
+        </p:blipFill>
+        <p:spPr>
+          <a:xfrm>
+            <a:off x="4892040" y="1645920"/>
+            <a:ext cx="3886200" cy="3252383"/>
+          </a:xfrm>
+          <a:prstGeom prst="rect">
+            <a:avLst/>
+          </a:prstGeom>
+        </p:spPr>
+      </p:pic>
     </p:spTree>
     <p:extLst>
       <p:ext uri="{BB962C8B-B14F-4D97-AF65-F5344CB8AC3E}">
@@ -8556,7 +8799,7 @@
         <p:spPr>
           <a:xfrm xmlns:a="http://schemas.openxmlformats.org/drawingml/2006/main">
             <a:off x="762000" y="1619250"/>
-            <a:ext cx="7620000" cy="1466850"/>
+            <a:ext cx="3977639" cy="1466850"/>
           </a:xfrm>
           <a:prstGeom xmlns:a="http://schemas.openxmlformats.org/drawingml/2006/main" prst="rect">
             <a:avLst/>
@@ -8584,7 +8827,7 @@
               </a:defRPr>
             </a:pPr>
             <a:r>
-              <a:rPr sz="2400" b="0">
+              <a:rPr sz="1800" b="0">
                 <a:solidFill>
                   <a:srgbClr val="111111"/>
                 </a:solidFill>
@@ -8608,15 +8851,15 @@
               </a:defRPr>
             </a:pPr>
             <a:r>
-              <a:rPr sz="2400" b="0">
-                <a:solidFill>
-                  <a:srgbClr val="111111"/>
-                </a:solidFill>
-                <a:latin typeface="Calibri"/>
-                <a:ea typeface="Calibri"/>
-                <a:cs typeface="Calibri"/>
-              </a:rPr>
-              <a:t>Larma 112 vid akut fara och följ räddningsinstruktioner.</a:t>
+              <a:rPr sz="1800" b="0">
+                <a:solidFill>
+                  <a:srgbClr val="111111"/>
+                </a:solidFill>
+                <a:latin typeface="Calibri"/>
+                <a:ea typeface="Calibri"/>
+                <a:cs typeface="Calibri"/>
+              </a:rPr>
+              <a:t>Larma enligt fartygets nödinstruktion. I hamn: 112.</a:t>
             </a:r>
           </a:p>
         </p:txBody>
@@ -8638,7 +8881,7 @@
         <p:spPr>
           <a:xfrm xmlns:a="http://schemas.openxmlformats.org/drawingml/2006/main">
             <a:off x="762000" y="3200400"/>
-            <a:ext cx="7620000" cy="838200"/>
+            <a:ext cx="3977639" cy="838200"/>
           </a:xfrm>
           <a:prstGeom xmlns:a="http://schemas.openxmlformats.org/drawingml/2006/main" prst="rect">
             <a:avLst/>
@@ -8666,7 +8909,7 @@
               </a:defRPr>
             </a:pPr>
             <a:r>
-              <a:rPr sz="2925" b="1">
+              <a:rPr sz="2550" b="1">
                 <a:solidFill>
                   <a:srgbClr val="064F91"/>
                 </a:solidFill>
@@ -8674,7 +8917,7 @@
                 <a:ea typeface="Calibri"/>
                 <a:cs typeface="Calibri"/>
               </a:rPr>
-              <a:t>Kontakta sjukvården efter strömgenomgång</a:t>
+              <a:t>Till sjöss: radiomedicinsk rådgivning (TMAS)</a:t>
             </a:r>
           </a:p>
         </p:txBody>
@@ -8696,7 +8939,7 @@
         <p:spPr>
           <a:xfrm xmlns:a="http://schemas.openxmlformats.org/drawingml/2006/main">
             <a:off x="762000" y="4429125"/>
-            <a:ext cx="7620000" cy="1352550"/>
+            <a:ext cx="3977639" cy="1352550"/>
           </a:xfrm>
           <a:prstGeom xmlns:a="http://schemas.openxmlformats.org/drawingml/2006/main" prst="rect">
             <a:avLst/>
@@ -8724,7 +8967,7 @@
               </a:defRPr>
             </a:pPr>
             <a:r>
-              <a:rPr sz="2250" b="0">
+              <a:rPr sz="1700" b="0">
                 <a:solidFill>
                   <a:srgbClr val="111111"/>
                 </a:solidFill>
@@ -8748,15 +8991,15 @@
               </a:defRPr>
             </a:pPr>
             <a:r>
-              <a:rPr sz="2250" b="0">
-                <a:solidFill>
-                  <a:srgbClr val="111111"/>
-                </a:solidFill>
-                <a:latin typeface="Calibri"/>
-                <a:ea typeface="Calibri"/>
-                <a:cs typeface="Calibri"/>
-              </a:rPr>
-              <a:t>Vid högspänning håll avstånd tills ansvarig säkrat platsen.</a:t>
+              <a:rPr sz="1700" b="0">
+                <a:solidFill>
+                  <a:srgbClr val="111111"/>
+                </a:solidFill>
+                <a:latin typeface="Calibri"/>
+                <a:ea typeface="Calibri"/>
+                <a:cs typeface="Calibri"/>
+              </a:rPr>
+              <a:t>Vid högspänning håll avstånd tills behörig person säkrat platsen.</a:t>
             </a:r>
           </a:p>
         </p:txBody>
@@ -8819,6 +9062,30 @@
           </a:p>
         </p:txBody>
       </p:sp>
+      <p:pic xmlns:a="http://schemas.openxmlformats.org/drawingml/2006/main" xmlns:r="http://schemas.openxmlformats.org/officeDocument/2006/relationships">
+        <p:nvPicPr>
+          <p:cNvPr id="9" name="Figur: Fem steg vid en elolycka ombord: skydda " descr="Fem steg vid en elolycka ombord: skydda dig själv, bryt strömmen om det går säkert, larma enligt nödinstruktionen, andning och HLR när platsen är säker, medicinsk rådgivning. Till sjöss TMAS via JRCC, i hamn 112"/>
+          <p:cNvPicPr>
+            <a:picLocks noChangeAspect="1"/>
+          </p:cNvPicPr>
+          <p:nvPr/>
+        </p:nvPicPr>
+        <p:blipFill>
+          <a:blip r:embed="rId3"/>
+          <a:stretch>
+            <a:fillRect/>
+          </a:stretch>
+        </p:blipFill>
+        <p:spPr>
+          <a:xfrm>
+            <a:off x="4892040" y="1645920"/>
+            <a:ext cx="3886200" cy="3976745"/>
+          </a:xfrm>
+          <a:prstGeom prst="rect">
+            <a:avLst/>
+          </a:prstGeom>
+        </p:spPr>
+      </p:pic>
     </p:spTree>
     <p:extLst>
       <p:ext uri="{BB962C8B-B14F-4D97-AF65-F5344CB8AC3E}">
@@ -9757,7 +10024,7 @@
         <p:spPr>
           <a:xfrm xmlns:a="http://schemas.openxmlformats.org/drawingml/2006/main">
             <a:off x="762000" y="1638300"/>
-            <a:ext cx="7620000" cy="876300"/>
+            <a:ext cx="3977639" cy="876300"/>
           </a:xfrm>
           <a:prstGeom xmlns:a="http://schemas.openxmlformats.org/drawingml/2006/main" prst="rect">
             <a:avLst/>
@@ -9792,7 +10059,62 @@
                 <a:ea typeface="Calibri"/>
                 <a:cs typeface="Calibri"/>
               </a:rPr>
-              <a:t>Ifel ≈ U/Rslinga i en enkel modell</a:t>
+              <a:t>I</a:t>
+            </a:r>
+            <a:r>
+              <a:rPr sz="2400" b="1" baseline="-25000">
+                <a:solidFill>
+                  <a:srgbClr val="064F91"/>
+                </a:solidFill>
+                <a:latin typeface="Calibri"/>
+                <a:ea typeface="Calibri"/>
+                <a:cs typeface="Calibri"/>
+              </a:rPr>
+              <a:t>fel</a:t>
+            </a:r>
+            <a:r>
+              <a:rPr sz="2400" b="1">
+                <a:solidFill>
+                  <a:srgbClr val="064F91"/>
+                </a:solidFill>
+                <a:latin typeface="Calibri"/>
+                <a:ea typeface="Calibri"/>
+                <a:cs typeface="Calibri"/>
+              </a:rPr>
+              <a:t> ≈ U/</a:t>
+            </a:r>
+            <a:r>
+              <a:rPr sz="2400" b="1">
+                <a:solidFill>
+                  <a:srgbClr val="064F91"/>
+                </a:solidFill>
+                <a:latin typeface="Calibri"/>
+                <a:ea typeface="Calibri"/>
+                <a:cs typeface="Calibri"/>
+              </a:rPr>
+              <a:t>R</a:t>
+            </a:r>
+            <a:r>
+              <a:rPr sz="2400" b="1" baseline="-25000">
+                <a:solidFill>
+                  <a:srgbClr val="064F91"/>
+                </a:solidFill>
+                <a:latin typeface="Calibri"/>
+                <a:ea typeface="Calibri"/>
+                <a:cs typeface="Calibri"/>
+              </a:rPr>
+              <a:t>slinga</a:t>
+            </a:r>
+            <a:r>
+              <a:rPr sz="2400" b="1">
+                <a:solidFill>
+                  <a:srgbClr val="064F91"/>
+                </a:solidFill>
+                <a:latin typeface="Calibri"/>
+                <a:ea typeface="Calibri"/>
+                <a:cs typeface="Calibri"/>
+              </a:rPr>
+              <a:t> i en enkel modell</a:t>
             </a:r>
           </a:p>
         </p:txBody>
@@ -9814,7 +10136,7 @@
         <p:spPr>
           <a:xfrm xmlns:a="http://schemas.openxmlformats.org/drawingml/2006/main">
             <a:off x="762000" y="2667000"/>
-            <a:ext cx="7620000" cy="952500"/>
+            <a:ext cx="3977639" cy="952500"/>
           </a:xfrm>
           <a:prstGeom xmlns:a="http://schemas.openxmlformats.org/drawingml/2006/main" prst="rect">
             <a:avLst/>
@@ -9841,7 +10163,7 @@
               </a:defRPr>
             </a:pPr>
             <a:r>
-              <a:rPr sz="2100" b="0">
+              <a:rPr sz="1700" b="0">
                 <a:solidFill>
                   <a:srgbClr val="111111"/>
                 </a:solidFill>
@@ -9871,7 +10193,7 @@
         <p:spPr>
           <a:xfrm xmlns:a="http://schemas.openxmlformats.org/drawingml/2006/main">
             <a:off x="762000" y="3800475"/>
-            <a:ext cx="7620000" cy="981075"/>
+            <a:ext cx="3977639" cy="981075"/>
           </a:xfrm>
           <a:prstGeom xmlns:a="http://schemas.openxmlformats.org/drawingml/2006/main" prst="rect">
             <a:avLst/>
@@ -9898,15 +10220,15 @@
               </a:defRPr>
             </a:pPr>
             <a:r>
-              <a:rPr sz="2025" b="0">
-                <a:solidFill>
-                  <a:srgbClr val="111111"/>
-                </a:solidFill>
-                <a:latin typeface="Calibri"/>
-                <a:ea typeface="Calibri"/>
-                <a:cs typeface="Calibri"/>
-              </a:rPr>
-              <a:t>Förutsättningar: 24 V-batteri med stor kortslutningsförmåga. Ingen total felresistans anges, så exakt ström kan inte beräknas.</a:t>
+              <a:rPr sz="1600" b="0">
+                <a:solidFill>
+                  <a:srgbClr val="111111"/>
+                </a:solidFill>
+                <a:latin typeface="Calibri"/>
+                <a:ea typeface="Calibri"/>
+                <a:cs typeface="Calibri"/>
+              </a:rPr>
+              <a:t>Förutsättningar: 24 V-batteri med stor kortslutningsförmåga. Ingen total felresistans anges, så exakt ström kan inte beräknas.</a:t>
             </a:r>
           </a:p>
         </p:txBody>
@@ -9928,7 +10250,7 @@
         <p:spPr>
           <a:xfrm xmlns:a="http://schemas.openxmlformats.org/drawingml/2006/main">
             <a:off x="762000" y="5010150"/>
-            <a:ext cx="7620000" cy="990600"/>
+            <a:ext cx="3977639" cy="990600"/>
           </a:xfrm>
           <a:prstGeom xmlns:a="http://schemas.openxmlformats.org/drawingml/2006/main" prst="rect">
             <a:avLst/>
@@ -9963,7 +10285,40 @@
                 <a:ea typeface="Calibri"/>
                 <a:cs typeface="Calibri"/>
               </a:rPr>
-              <a:t>Arbetsgång: Beskriv en följd av hög felström, exempelvis värme eller brand. Hitta inte på ett amperetal.</a:t>
+              <a:t>Arbetsgång: Vad händer i slingan när </a:t>
+            </a:r>
+            <a:r>
+              <a:rPr sz="2025" b="0">
+                <a:solidFill>
+                  <a:srgbClr val="111111"/>
+                </a:solidFill>
+                <a:latin typeface="Calibri"/>
+                <a:ea typeface="Calibri"/>
+                <a:cs typeface="Calibri"/>
+              </a:rPr>
+              <a:t>R</a:t>
+            </a:r>
+            <a:r>
+              <a:rPr sz="2025" b="0" baseline="-25000">
+                <a:solidFill>
+                  <a:srgbClr val="111111"/>
+                </a:solidFill>
+                <a:latin typeface="Calibri"/>
+                <a:ea typeface="Calibri"/>
+                <a:cs typeface="Calibri"/>
+              </a:rPr>
+              <a:t>slinga</a:t>
+            </a:r>
+            <a:r>
+              <a:rPr sz="2025" b="0">
+                <a:solidFill>
+                  <a:srgbClr val="111111"/>
+                </a:solidFill>
+                <a:latin typeface="Calibri"/>
+                <a:ea typeface="Calibri"/>
+                <a:cs typeface="Calibri"/>
+              </a:rPr>
+              <a:t> är liten? Hitta inte på ett amperetal.</a:t>
             </a:r>
           </a:p>
         </p:txBody>
@@ -10025,6 +10380,30 @@
           </a:p>
         </p:txBody>
       </p:sp>
+      <p:pic xmlns:a="http://schemas.openxmlformats.org/drawingml/2006/main" xmlns:r="http://schemas.openxmlformats.org/officeDocument/2006/relationships">
+        <p:nvPicPr>
+          <p:cNvPr id="16" name="Figur: 24 V-batteri vars poler kortsluts av ett" descr="24 V-batteri vars poler kortsluts av ett verktyg; felströmmen ungefär U delat med slingans resistans"/>
+          <p:cNvPicPr>
+            <a:picLocks noChangeAspect="1"/>
+          </p:cNvPicPr>
+          <p:nvPr/>
+        </p:nvPicPr>
+        <p:blipFill>
+          <a:blip r:embed="rId3"/>
+          <a:stretch>
+            <a:fillRect/>
+          </a:stretch>
+        </p:blipFill>
+        <p:spPr>
+          <a:xfrm>
+            <a:off x="4892040" y="1645920"/>
+            <a:ext cx="3886200" cy="2890202"/>
+          </a:xfrm>
+          <a:prstGeom prst="rect">
+            <a:avLst/>
+          </a:prstGeom>
+        </p:spPr>
+      </p:pic>
     </p:spTree>
     <p:extLst>
       <p:ext uri="{BB962C8B-B14F-4D97-AF65-F5344CB8AC3E}">
@@ -10298,7 +10677,7 @@
                 <a:ea typeface="Calibri"/>
                 <a:cs typeface="Calibri"/>
               </a:rPr>
-              <a:t>Redovisa din beräkning eller motivera ditt beslut.</a:t>
+              <a:t>Motivera ditt beslut.</a:t>
             </a:r>
           </a:p>
         </p:txBody>
@@ -10630,7 +11009,7 @@
                 <a:ea typeface="Calibri"/>
                 <a:cs typeface="Calibri"/>
               </a:rPr>
-              <a:t>Förutsättningar: Platsen kan vara spänningssatt. Vid akut fara larmas 112. Vid högspänning säkrar ansvarig platsen.</a:t>
+              <a:t>Förutsättningar: Platsen kan vara spänningssatt. Larm enligt nödinstruktionen. Vid högspänning säkrar behörig person platsen.</a:t>
             </a:r>
           </a:p>
         </p:txBody>
@@ -11022,7 +11401,7 @@
                 <a:ea typeface="Calibri"/>
                 <a:cs typeface="Calibri"/>
               </a:rPr>
-              <a:t>Redovisa din beräkning eller motivera ditt beslut.</a:t>
+              <a:t>Motivera ditt beslut.</a:t>
             </a:r>
           </a:p>
         </p:txBody>
@@ -11411,7 +11790,7 @@
                 <a:ea typeface="Calibri"/>
                 <a:cs typeface="Calibri"/>
               </a:rPr>
-              <a:t>Arbetsgång: Rekommendera avbrott, säker plats och sjukvårdskontakt. Beskriv även rapportering enligt arbetsplatsens rutin.</a:t>
+              <a:t>Arbetsgång: Vad rekommenderar du, och varför? Beskriv även rapporteringen enligt rutinen ombord.</a:t>
             </a:r>
           </a:p>
         </p:txBody>
@@ -12260,7 +12639,7 @@
                 <a:ea typeface="Calibri"/>
                 <a:cs typeface="Calibri"/>
               </a:rPr>
-              <a:t>Redovisa din beräkning eller motivera ditt beslut.</a:t>
+              <a:t>Motivera ditt beslut.</a:t>
             </a:r>
           </a:p>
         </p:txBody>
@@ -12984,7 +13363,7 @@
                 <a:ea typeface="Calibri"/>
                 <a:cs typeface="Calibri"/>
               </a:rPr>
-              <a:t>Redovisa din beräkning eller motivera ditt beslut.</a:t>
+              <a:t>Motivera ditt beslut.</a:t>
             </a:r>
           </a:p>
         </p:txBody>
@@ -13708,7 +14087,7 @@
                 <a:ea typeface="Calibri"/>
                 <a:cs typeface="Calibri"/>
               </a:rPr>
-              <a:t>Redovisa din beräkning eller motivera ditt beslut.</a:t>
+              <a:t>Motivera ditt beslut.</a:t>
             </a:r>
           </a:p>
         </p:txBody>
@@ -13928,7 +14307,7 @@
                 <a:ea typeface="Calibri"/>
                 <a:cs typeface="Calibri"/>
               </a:rPr>
-              <a:t>Vilken uppgift saknas oftast när någon bara säger ”det är 24 V”?</a:t>
+              <a:t>Vilka uppgifter saknas oftast när någon bara säger ”det är 24 V”?</a:t>
             </a:r>
           </a:p>
         </p:txBody>
@@ -14414,64 +14793,6 @@
       </p:sp>
       <p:sp>
         <p:nvSpPr>
-          <p:cNvPr id="7" name="Källor och lärarstöd finns även i bildanteckningarna.">
-            <a:extLst xmlns:a="http://schemas.openxmlformats.org/drawingml/2006/main">
-              <a:ext uri="{FF2B5EF4-FFF2-40B4-BE49-F238E27FC236}">
-                <a16:creationId xmlns:a16="http://schemas.microsoft.com/office/drawing/2014/main" id="{AFE2E5B0-656F-4861-953F-CA0D662021A3}"/>
-              </a:ext>
-            </a:extLst>
-          </p:cNvPr>
-          <p:cNvSpPr>
-            <a:spLocks xmlns:a="http://schemas.openxmlformats.org/drawingml/2006/main" noGrp="1"/>
-          </p:cNvSpPr>
-          <p:nvPr/>
-        </p:nvSpPr>
-        <p:spPr>
-          <a:xfrm xmlns:a="http://schemas.openxmlformats.org/drawingml/2006/main">
-            <a:off x="762000" y="5676900"/>
-            <a:ext cx="7620000" cy="352425"/>
-          </a:xfrm>
-          <a:prstGeom xmlns:a="http://schemas.openxmlformats.org/drawingml/2006/main" prst="rect">
-            <a:avLst/>
-          </a:prstGeom>
-          <a:noFill xmlns:a="http://schemas.openxmlformats.org/drawingml/2006/main"/>
-          <a:ln xmlns:a="http://schemas.openxmlformats.org/drawingml/2006/main" w="0">
-            <a:noFill/>
-          </a:ln>
-        </p:spPr>
-        <p:txBody>
-          <a:bodyPr xmlns:a="http://schemas.openxmlformats.org/drawingml/2006/main" wrap="square" lIns="0" tIns="0" rIns="0" bIns="0" anchor="t">
-            <a:noAutofit/>
-          </a:bodyPr>
-          <a:lstStyle xmlns:a="http://schemas.openxmlformats.org/drawingml/2006/main"/>
-          <a:p xmlns:a="http://schemas.openxmlformats.org/drawingml/2006/main">
-            <a:pPr algn="l">
-              <a:buNone/>
-              <a:defRPr sz="1800" b="0">
-                <a:solidFill>
-                  <a:srgbClr val="111111"/>
-                </a:solidFill>
-                <a:latin typeface="Calibri"/>
-                <a:ea typeface="Calibri"/>
-                <a:cs typeface="Calibri"/>
-              </a:defRPr>
-            </a:pPr>
-            <a:r>
-              <a:rPr sz="1800" b="0">
-                <a:solidFill>
-                  <a:srgbClr val="111111"/>
-                </a:solidFill>
-                <a:latin typeface="Calibri"/>
-                <a:ea typeface="Calibri"/>
-                <a:cs typeface="Calibri"/>
-              </a:rPr>
-              <a:t>Källor och lärarstöd finns även i bildanteckningarna.</a:t>
-            </a:r>
-          </a:p>
-        </p:txBody>
-      </p:sp>
-      <p:sp>
-        <p:nvSpPr>
           <p:cNvPr id="8" name="22">
             <a:extLst xmlns:a="http://schemas.openxmlformats.org/drawingml/2006/main">
               <a:ext uri="{FF2B5EF4-FFF2-40B4-BE49-F238E27FC236}">
@@ -15562,7 +15883,7 @@
         <p:spPr>
           <a:xfrm xmlns:a="http://schemas.openxmlformats.org/drawingml/2006/main">
             <a:off x="762000" y="1619250"/>
-            <a:ext cx="7620000" cy="1466850"/>
+            <a:ext cx="3977639" cy="1466850"/>
           </a:xfrm>
           <a:prstGeom xmlns:a="http://schemas.openxmlformats.org/drawingml/2006/main" prst="rect">
             <a:avLst/>
@@ -15590,7 +15911,7 @@
               </a:defRPr>
             </a:pPr>
             <a:r>
-              <a:rPr sz="2400" b="0">
+              <a:rPr sz="1900" b="0">
                 <a:solidFill>
                   <a:srgbClr val="111111"/>
                 </a:solidFill>
@@ -15614,7 +15935,7 @@
               </a:defRPr>
             </a:pPr>
             <a:r>
-              <a:rPr sz="2400" b="0">
+              <a:rPr sz="1900" b="0">
                 <a:solidFill>
                   <a:srgbClr val="111111"/>
                 </a:solidFill>
@@ -15644,7 +15965,7 @@
         <p:spPr>
           <a:xfrm xmlns:a="http://schemas.openxmlformats.org/drawingml/2006/main">
             <a:off x="762000" y="3200400"/>
-            <a:ext cx="7620000" cy="838200"/>
+            <a:ext cx="3977639" cy="838200"/>
           </a:xfrm>
           <a:prstGeom xmlns:a="http://schemas.openxmlformats.org/drawingml/2006/main" prst="rect">
             <a:avLst/>
@@ -15672,7 +15993,7 @@
               </a:defRPr>
             </a:pPr>
             <a:r>
-              <a:rPr sz="2925" b="1">
+              <a:rPr sz="2650" b="1">
                 <a:solidFill>
                   <a:srgbClr val="064F91"/>
                 </a:solidFill>
@@ -15702,7 +16023,7 @@
         <p:spPr>
           <a:xfrm xmlns:a="http://schemas.openxmlformats.org/drawingml/2006/main">
             <a:off x="762000" y="4429125"/>
-            <a:ext cx="7620000" cy="1352550"/>
+            <a:ext cx="3977639" cy="1352550"/>
           </a:xfrm>
           <a:prstGeom xmlns:a="http://schemas.openxmlformats.org/drawingml/2006/main" prst="rect">
             <a:avLst/>
@@ -15730,7 +16051,7 @@
               </a:defRPr>
             </a:pPr>
             <a:r>
-              <a:rPr sz="2250" b="0">
+              <a:rPr sz="2000" b="0">
                 <a:solidFill>
                   <a:srgbClr val="111111"/>
                 </a:solidFill>
@@ -15754,7 +16075,7 @@
               </a:defRPr>
             </a:pPr>
             <a:r>
-              <a:rPr sz="2250" b="0">
+              <a:rPr sz="2000" b="0">
                 <a:solidFill>
                   <a:srgbClr val="111111"/>
                 </a:solidFill>
@@ -15825,6 +16146,30 @@
           </a:p>
         </p:txBody>
       </p:sp>
+      <p:pic xmlns:a="http://schemas.openxmlformats.org/drawingml/2006/main" xmlns:r="http://schemas.openxmlformats.org/officeDocument/2006/relationships">
+        <p:nvPicPr>
+          <p:cNvPr id="9" name="Figur: Figur med två strömvägar genom kroppen: " descr="Figur med två strömvägar genom kroppen: hand till hand och hand till fot; båda passerar bröstkorgen nära hjärtat"/>
+          <p:cNvPicPr>
+            <a:picLocks noChangeAspect="1"/>
+          </p:cNvPicPr>
+          <p:nvPr/>
+        </p:nvPicPr>
+        <p:blipFill>
+          <a:blip r:embed="rId3"/>
+          <a:stretch>
+            <a:fillRect/>
+          </a:stretch>
+        </p:blipFill>
+        <p:spPr>
+          <a:xfrm>
+            <a:off x="4892040" y="1645920"/>
+            <a:ext cx="3886200" cy="3795655"/>
+          </a:xfrm>
+          <a:prstGeom prst="rect">
+            <a:avLst/>
+          </a:prstGeom>
+        </p:spPr>
+      </p:pic>
     </p:spTree>
     <p:extLst>
       <p:ext uri="{BB962C8B-B14F-4D97-AF65-F5344CB8AC3E}">
@@ -15946,7 +16291,7 @@
         <p:spPr>
           <a:xfrm xmlns:a="http://schemas.openxmlformats.org/drawingml/2006/main">
             <a:off x="762000" y="1619250"/>
-            <a:ext cx="7620000" cy="1466850"/>
+            <a:ext cx="3977639" cy="1466850"/>
           </a:xfrm>
           <a:prstGeom xmlns:a="http://schemas.openxmlformats.org/drawingml/2006/main" prst="rect">
             <a:avLst/>
@@ -15974,7 +16319,7 @@
               </a:defRPr>
             </a:pPr>
             <a:r>
-              <a:rPr sz="2400" b="0">
+              <a:rPr sz="1950" b="0">
                 <a:solidFill>
                   <a:srgbClr val="111111"/>
                 </a:solidFill>
@@ -15998,7 +16343,7 @@
               </a:defRPr>
             </a:pPr>
             <a:r>
-              <a:rPr sz="2400" b="0">
+              <a:rPr sz="1950" b="0">
                 <a:solidFill>
                   <a:srgbClr val="111111"/>
                 </a:solidFill>
@@ -16028,7 +16373,7 @@
         <p:spPr>
           <a:xfrm xmlns:a="http://schemas.openxmlformats.org/drawingml/2006/main">
             <a:off x="762000" y="3200400"/>
-            <a:ext cx="7620000" cy="838200"/>
+            <a:ext cx="3977639" cy="838200"/>
           </a:xfrm>
           <a:prstGeom xmlns:a="http://schemas.openxmlformats.org/drawingml/2006/main" prst="rect">
             <a:avLst/>
@@ -16056,7 +16401,7 @@
               </a:defRPr>
             </a:pPr>
             <a:r>
-              <a:rPr sz="2925" b="1">
+              <a:rPr sz="2650" b="1">
                 <a:solidFill>
                   <a:srgbClr val="064F91"/>
                 </a:solidFill>
@@ -16064,7 +16409,7 @@
                 <a:ea typeface="Calibri"/>
                 <a:cs typeface="Calibri"/>
               </a:rPr>
-              <a:t>I = U/R är en förenklad beräkningsmodell</a:t>
+              <a:t>I = U/R är en förenklad beräkningsmodell</a:t>
             </a:r>
           </a:p>
         </p:txBody>
@@ -16086,7 +16431,7 @@
         <p:spPr>
           <a:xfrm xmlns:a="http://schemas.openxmlformats.org/drawingml/2006/main">
             <a:off x="762000" y="4429125"/>
-            <a:ext cx="7620000" cy="1352550"/>
+            <a:ext cx="3977639" cy="1352550"/>
           </a:xfrm>
           <a:prstGeom xmlns:a="http://schemas.openxmlformats.org/drawingml/2006/main" prst="rect">
             <a:avLst/>
@@ -16114,7 +16459,7 @@
               </a:defRPr>
             </a:pPr>
             <a:r>
-              <a:rPr sz="2250" b="0">
+              <a:rPr sz="2000" b="0">
                 <a:solidFill>
                   <a:srgbClr val="111111"/>
                 </a:solidFill>
@@ -16138,7 +16483,7 @@
               </a:defRPr>
             </a:pPr>
             <a:r>
-              <a:rPr sz="2250" b="0">
+              <a:rPr sz="2000" b="0">
                 <a:solidFill>
                   <a:srgbClr val="111111"/>
                 </a:solidFill>
@@ -16209,6 +16554,30 @@
           </a:p>
         </p:txBody>
       </p:sp>
+      <p:pic xmlns:a="http://schemas.openxmlformats.org/drawingml/2006/main" xmlns:r="http://schemas.openxmlformats.org/officeDocument/2006/relationships">
+        <p:nvPicPr>
+          <p:cNvPr id="9" name="Figur: Metallhölje med isolationsfel och bruten" descr="Metallhölje med isolationsfel och bruten skyddsledare; en person rör höljet och står på ledande stålskrov. Beröringsspänningen är skillnaden mellan höljets och däckets potential"/>
+          <p:cNvPicPr>
+            <a:picLocks noChangeAspect="1"/>
+          </p:cNvPicPr>
+          <p:nvPr/>
+        </p:nvPicPr>
+        <p:blipFill>
+          <a:blip r:embed="rId3"/>
+          <a:stretch>
+            <a:fillRect/>
+          </a:stretch>
+        </p:blipFill>
+        <p:spPr>
+          <a:xfrm>
+            <a:off x="4892040" y="1645920"/>
+            <a:ext cx="3886200" cy="3795655"/>
+          </a:xfrm>
+          <a:prstGeom prst="rect">
+            <a:avLst/>
+          </a:prstGeom>
+        </p:spPr>
+      </p:pic>
     </p:spTree>
     <p:extLst>
       <p:ext uri="{BB962C8B-B14F-4D97-AF65-F5344CB8AC3E}">
@@ -16330,7 +16699,7 @@
         <p:spPr>
           <a:xfrm xmlns:a="http://schemas.openxmlformats.org/drawingml/2006/main">
             <a:off x="762000" y="1619250"/>
-            <a:ext cx="7620000" cy="1466850"/>
+            <a:ext cx="3977639" cy="1466850"/>
           </a:xfrm>
           <a:prstGeom xmlns:a="http://schemas.openxmlformats.org/drawingml/2006/main" prst="rect">
             <a:avLst/>
@@ -16358,7 +16727,7 @@
               </a:defRPr>
             </a:pPr>
             <a:r>
-              <a:rPr sz="2400" b="0">
+              <a:rPr sz="1900" b="0">
                 <a:solidFill>
                   <a:srgbClr val="111111"/>
                 </a:solidFill>
@@ -16382,7 +16751,7 @@
               </a:defRPr>
             </a:pPr>
             <a:r>
-              <a:rPr sz="2400" b="0">
+              <a:rPr sz="1900" b="0">
                 <a:solidFill>
                   <a:srgbClr val="111111"/>
                 </a:solidFill>
@@ -16412,7 +16781,7 @@
         <p:spPr>
           <a:xfrm xmlns:a="http://schemas.openxmlformats.org/drawingml/2006/main">
             <a:off x="762000" y="3200400"/>
-            <a:ext cx="7620000" cy="838200"/>
+            <a:ext cx="3977639" cy="838200"/>
           </a:xfrm>
           <a:prstGeom xmlns:a="http://schemas.openxmlformats.org/drawingml/2006/main" prst="rect">
             <a:avLst/>
@@ -16440,7 +16809,7 @@
               </a:defRPr>
             </a:pPr>
             <a:r>
-              <a:rPr sz="2925" b="1">
+              <a:rPr sz="2400" b="1">
                 <a:solidFill>
                   <a:srgbClr val="064F91"/>
                 </a:solidFill>
@@ -16470,7 +16839,7 @@
         <p:spPr>
           <a:xfrm xmlns:a="http://schemas.openxmlformats.org/drawingml/2006/main">
             <a:off x="762000" y="4429125"/>
-            <a:ext cx="7620000" cy="1352550"/>
+            <a:ext cx="3977639" cy="1352550"/>
           </a:xfrm>
           <a:prstGeom xmlns:a="http://schemas.openxmlformats.org/drawingml/2006/main" prst="rect">
             <a:avLst/>
@@ -16498,7 +16867,7 @@
               </a:defRPr>
             </a:pPr>
             <a:r>
-              <a:rPr sz="2250" b="0">
+              <a:rPr sz="1850" b="0">
                 <a:solidFill>
                   <a:srgbClr val="111111"/>
                 </a:solidFill>
@@ -16522,7 +16891,7 @@
               </a:defRPr>
             </a:pPr>
             <a:r>
-              <a:rPr sz="2250" b="0">
+              <a:rPr sz="1850" b="0">
                 <a:solidFill>
                   <a:srgbClr val="111111"/>
                 </a:solidFill>
@@ -16593,6 +16962,30 @@
           </a:p>
         </p:txBody>
       </p:sp>
+      <p:pic xmlns:a="http://schemas.openxmlformats.org/drawingml/2006/main" xmlns:r="http://schemas.openxmlformats.org/officeDocument/2006/relationships">
+        <p:nvPicPr>
+          <p:cNvPr id="9" name="Figur: Ljusbåge mellan två strömskenor med pila" descr="Ljusbåge mellan två strömskenor med pilar för värme, tryck, starkt ljus och splitter"/>
+          <p:cNvPicPr>
+            <a:picLocks noChangeAspect="1"/>
+          </p:cNvPicPr>
+          <p:nvPr/>
+        </p:nvPicPr>
+        <p:blipFill>
+          <a:blip r:embed="rId3"/>
+          <a:stretch>
+            <a:fillRect/>
+          </a:stretch>
+        </p:blipFill>
+        <p:spPr>
+          <a:xfrm>
+            <a:off x="4892040" y="1645920"/>
+            <a:ext cx="3886200" cy="3252383"/>
+          </a:xfrm>
+          <a:prstGeom prst="rect">
+            <a:avLst/>
+          </a:prstGeom>
+        </p:spPr>
+      </p:pic>
     </p:spTree>
     <p:extLst>
       <p:ext uri="{BB962C8B-B14F-4D97-AF65-F5344CB8AC3E}">
@@ -16713,7 +17106,7 @@
         <p:spPr>
           <a:xfrm xmlns:a="http://schemas.openxmlformats.org/drawingml/2006/main">
             <a:off x="762000" y="1571625"/>
-            <a:ext cx="7620000" cy="990600"/>
+            <a:ext cx="3977639" cy="990600"/>
           </a:xfrm>
           <a:prstGeom xmlns:a="http://schemas.openxmlformats.org/drawingml/2006/main" prst="rect">
             <a:avLst/>
@@ -16740,7 +17133,7 @@
               </a:defRPr>
             </a:pPr>
             <a:r>
-              <a:rPr sz="2175" b="0">
+              <a:rPr sz="2100" b="0">
                 <a:solidFill>
                   <a:srgbClr val="111111"/>
                 </a:solidFill>
@@ -16770,7 +17163,7 @@
         <p:spPr>
           <a:xfrm xmlns:a="http://schemas.openxmlformats.org/drawingml/2006/main">
             <a:off x="762000" y="2705100"/>
-            <a:ext cx="7620000" cy="790575"/>
+            <a:ext cx="3977639" cy="790575"/>
           </a:xfrm>
           <a:prstGeom xmlns:a="http://schemas.openxmlformats.org/drawingml/2006/main" prst="rect">
             <a:avLst/>
@@ -16827,7 +17220,7 @@
         <p:spPr>
           <a:xfrm xmlns:a="http://schemas.openxmlformats.org/drawingml/2006/main">
             <a:off x="762000" y="3657600"/>
-            <a:ext cx="7620000" cy="1524000"/>
+            <a:ext cx="3977639" cy="1524000"/>
           </a:xfrm>
           <a:prstGeom xmlns:a="http://schemas.openxmlformats.org/drawingml/2006/main" prst="rect">
             <a:avLst/>
@@ -16854,7 +17247,7 @@
               </a:defRPr>
             </a:pPr>
             <a:r>
-              <a:rPr sz="2063" b="0">
+              <a:rPr sz="1650" b="0">
                 <a:solidFill>
                   <a:srgbClr val="111111"/>
                 </a:solidFill>
@@ -16877,7 +17270,7 @@
               </a:defRPr>
             </a:pPr>
             <a:r>
-              <a:rPr sz="2063" b="0">
+              <a:rPr sz="1650" b="0">
                 <a:solidFill>
                   <a:srgbClr val="111111"/>
                 </a:solidFill>
@@ -16900,7 +17293,7 @@
               </a:defRPr>
             </a:pPr>
             <a:r>
-              <a:rPr sz="2063" b="0">
+              <a:rPr sz="1650" b="0">
                 <a:solidFill>
                   <a:srgbClr val="111111"/>
                 </a:solidFill>
@@ -16930,7 +17323,7 @@
         <p:spPr>
           <a:xfrm xmlns:a="http://schemas.openxmlformats.org/drawingml/2006/main">
             <a:off x="762000" y="5372100"/>
-            <a:ext cx="7620000" cy="685800"/>
+            <a:ext cx="3977639" cy="685800"/>
           </a:xfrm>
           <a:prstGeom xmlns:a="http://schemas.openxmlformats.org/drawingml/2006/main" prst="rect">
             <a:avLst/>
@@ -16957,7 +17350,7 @@
               </a:defRPr>
             </a:pPr>
             <a:r>
-              <a:rPr sz="1913" b="0">
+              <a:rPr sz="1550" b="0">
                 <a:solidFill>
                   <a:srgbClr val="111111"/>
                 </a:solidFill>
@@ -17027,6 +17420,30 @@
           </a:p>
         </p:txBody>
       </p:sp>
+      <p:pic xmlns:a="http://schemas.openxmlformats.org/drawingml/2006/main" xmlns:r="http://schemas.openxmlformats.org/officeDocument/2006/relationships">
+        <p:nvPicPr>
+          <p:cNvPr id="16" name="Figur: Skadad skarvkabel i vatten på däck, avsp" descr="Skadad skarvkabel i vatten på däck, avspärrad med band"/>
+          <p:cNvPicPr>
+            <a:picLocks noChangeAspect="1"/>
+          </p:cNvPicPr>
+          <p:nvPr/>
+        </p:nvPicPr>
+        <p:blipFill>
+          <a:blip r:embed="rId3"/>
+          <a:stretch>
+            <a:fillRect/>
+          </a:stretch>
+        </p:blipFill>
+        <p:spPr>
+          <a:xfrm>
+            <a:off x="4892040" y="1645920"/>
+            <a:ext cx="3886200" cy="2890202"/>
+          </a:xfrm>
+          <a:prstGeom prst="rect">
+            <a:avLst/>
+          </a:prstGeom>
+        </p:spPr>
+      </p:pic>
     </p:spTree>
     <p:extLst>
       <p:ext uri="{BB962C8B-B14F-4D97-AF65-F5344CB8AC3E}">

--- a/sjoskolan/vecka-42/aktuell/v42_01_Elektriska_risker_elev.pptx
+++ b/sjoskolan/vecka-42/aktuell/v42_01_Elektriska_risker_elev.pptx
@@ -3903,7 +3903,7 @@
                 <a:ea typeface="Calibri"/>
                 <a:cs typeface="Calibri"/>
               </a:rPr>
-              <a:t>Fukt och kontakt med ledande ytor kan öka möjligheten för ström genom kroppen.</a:t>
+              <a:t>Fukt och kontakt med ledande ytor gör det lättare för ström att gå genom kroppen.</a:t>
             </a:r>
           </a:p>
         </p:txBody>
@@ -3960,7 +3960,7 @@
                 <a:ea typeface="Calibri"/>
                 <a:cs typeface="Calibri"/>
               </a:rPr>
-              <a:t>Förutsättningar: Skadad arbetslampa på vått metalldäck. Spänningsnivå och skyddsfunktion är inte verifierade.</a:t>
+              <a:t>Förutsättningar: En skadad arbetslampa på ett vått metalldäck. Spänning och skydd är inte kontrollerade.</a:t>
             </a:r>
           </a:p>
         </p:txBody>
@@ -4017,7 +4017,7 @@
                 <a:ea typeface="Calibri"/>
                 <a:cs typeface="Calibri"/>
               </a:rPr>
-              <a:t>Arbetsgång: Välj två omständigheter ur fallet och förklara hur var och en kan öka risken.</a:t>
+              <a:t>Arbetsgång: Välj två omständigheter i fallet och förklara hur var och en ökar risken.</a:t>
             </a:r>
           </a:p>
         </p:txBody>
@@ -4627,7 +4627,7 @@
                 <a:ea typeface="Calibri"/>
                 <a:cs typeface="Calibri"/>
               </a:rPr>
-              <a:t>Strömgenomgång innebär en strömväg genom kroppen. Ljusbåge kan ge värme, tryck och splitter.</a:t>
+              <a:t>Vid strömgenomgång går strömmen genom kroppen. En ljusbåge ger värme, tryck och splitter.</a:t>
             </a:r>
           </a:p>
         </p:txBody>
@@ -4684,7 +4684,7 @@
                 <a:ea typeface="Calibri"/>
                 <a:cs typeface="Calibri"/>
               </a:rPr>
-              <a:t>Förutsättningar: En ljusbåge kan skada även utan att personen ingår i den elektriska strömvägen.</a:t>
+              <a:t>Förutsättningar: En ljusbåge kan skada även om ingen ström går genom personen.</a:t>
             </a:r>
           </a:p>
         </p:txBody>
@@ -4741,7 +4741,7 @@
                 <a:ea typeface="Calibri"/>
                 <a:cs typeface="Calibri"/>
               </a:rPr>
-              <a:t>Arbetsgång: Beskriv skademekanismen för varje händelse och ange den avgörande skillnaden.</a:t>
+              <a:t>Arbetsgång: Beskriv hur var och en skadar och ange den viktigaste skillnaden.</a:t>
             </a:r>
           </a:p>
         </p:txBody>
@@ -5294,95 +5294,7 @@
                 <a:ea typeface="Calibri"/>
                 <a:cs typeface="Calibri"/>
               </a:rPr>
-              <a:t>U</a:t>
-            </a:r>
-            <a:r>
-              <a:rPr sz="2400" b="1" baseline="-25000">
-                <a:solidFill>
-                  <a:srgbClr val="064F91"/>
-                </a:solidFill>
-                <a:latin typeface="Calibri"/>
-                <a:ea typeface="Calibri"/>
-                <a:cs typeface="Calibri"/>
-              </a:rPr>
-              <a:t>beröring</a:t>
-            </a:r>
-            <a:r>
-              <a:rPr sz="2400" b="1">
-                <a:solidFill>
-                  <a:srgbClr val="064F91"/>
-                </a:solidFill>
-                <a:latin typeface="Calibri"/>
-                <a:ea typeface="Calibri"/>
-                <a:cs typeface="Calibri"/>
-              </a:rPr>
-              <a:t> = |</a:t>
-            </a:r>
-            <a:r>
-              <a:rPr sz="2400" b="1">
-                <a:solidFill>
-                  <a:srgbClr val="064F91"/>
-                </a:solidFill>
-                <a:latin typeface="Calibri"/>
-                <a:ea typeface="Calibri"/>
-                <a:cs typeface="Calibri"/>
-              </a:rPr>
-              <a:t>V</a:t>
-            </a:r>
-            <a:r>
-              <a:rPr sz="2400" b="1" baseline="-25000">
-                <a:solidFill>
-                  <a:srgbClr val="064F91"/>
-                </a:solidFill>
-                <a:latin typeface="Calibri"/>
-                <a:ea typeface="Calibri"/>
-                <a:cs typeface="Calibri"/>
-              </a:rPr>
-              <a:t>A</a:t>
-            </a:r>
-            <a:r>
-              <a:rPr sz="2400" b="1">
-                <a:solidFill>
-                  <a:srgbClr val="064F91"/>
-                </a:solidFill>
-                <a:latin typeface="Calibri"/>
-                <a:ea typeface="Calibri"/>
-                <a:cs typeface="Calibri"/>
-              </a:rPr>
-              <a:t> − </a:t>
-            </a:r>
-            <a:r>
-              <a:rPr sz="2400" b="1">
-                <a:solidFill>
-                  <a:srgbClr val="064F91"/>
-                </a:solidFill>
-                <a:latin typeface="Calibri"/>
-                <a:ea typeface="Calibri"/>
-                <a:cs typeface="Calibri"/>
-              </a:rPr>
-              <a:t>V</a:t>
-            </a:r>
-            <a:r>
-              <a:rPr sz="2400" b="1" baseline="-25000">
-                <a:solidFill>
-                  <a:srgbClr val="064F91"/>
-                </a:solidFill>
-                <a:latin typeface="Calibri"/>
-                <a:ea typeface="Calibri"/>
-                <a:cs typeface="Calibri"/>
-              </a:rPr>
-              <a:t>B</a:t>
-            </a:r>
-            <a:r>
-              <a:rPr sz="2400" b="1">
-                <a:solidFill>
-                  <a:srgbClr val="064F91"/>
-                </a:solidFill>
-                <a:latin typeface="Calibri"/>
-                <a:ea typeface="Calibri"/>
-                <a:cs typeface="Calibri"/>
-              </a:rPr>
-              <a:t>|</a:t>
+              <a:t>Uberöring = |VA − VB|</a:t>
             </a:r>
           </a:p>
         </p:txBody>
@@ -5439,62 +5351,7 @@
                 <a:ea typeface="Calibri"/>
                 <a:cs typeface="Calibri"/>
               </a:rPr>
-              <a:t>V</a:t>
-            </a:r>
-            <a:r>
-              <a:rPr sz="2050" b="0" baseline="-25000">
-                <a:solidFill>
-                  <a:srgbClr val="111111"/>
-                </a:solidFill>
-                <a:latin typeface="Calibri"/>
-                <a:ea typeface="Calibri"/>
-                <a:cs typeface="Calibri"/>
-              </a:rPr>
-              <a:t>A</a:t>
-            </a:r>
-            <a:r>
-              <a:rPr sz="2050" b="0">
-                <a:solidFill>
-                  <a:srgbClr val="111111"/>
-                </a:solidFill>
-                <a:latin typeface="Calibri"/>
-                <a:ea typeface="Calibri"/>
-                <a:cs typeface="Calibri"/>
-              </a:rPr>
-              <a:t> och </a:t>
-            </a:r>
-            <a:r>
-              <a:rPr sz="2050" b="0">
-                <a:solidFill>
-                  <a:srgbClr val="111111"/>
-                </a:solidFill>
-                <a:latin typeface="Calibri"/>
-                <a:ea typeface="Calibri"/>
-                <a:cs typeface="Calibri"/>
-              </a:rPr>
-              <a:t>V</a:t>
-            </a:r>
-            <a:r>
-              <a:rPr sz="2050" b="0" baseline="-25000">
-                <a:solidFill>
-                  <a:srgbClr val="111111"/>
-                </a:solidFill>
-                <a:latin typeface="Calibri"/>
-                <a:ea typeface="Calibri"/>
-                <a:cs typeface="Calibri"/>
-              </a:rPr>
-              <a:t>B</a:t>
-            </a:r>
-            <a:r>
-              <a:rPr sz="2050" b="0">
-                <a:solidFill>
-                  <a:srgbClr val="111111"/>
-                </a:solidFill>
-                <a:latin typeface="Calibri"/>
-                <a:ea typeface="Calibri"/>
-                <a:cs typeface="Calibri"/>
-              </a:rPr>
-              <a:t> är potentialerna hos två punkter som kan beröras samtidigt.</a:t>
+              <a:t>VA och VB är spänningen i de två punkter som kan röras samtidigt.</a:t>
             </a:r>
           </a:p>
         </p:txBody>
@@ -5551,7 +5408,7 @@
                 <a:ea typeface="Calibri"/>
                 <a:cs typeface="Calibri"/>
               </a:rPr>
-              <a:t>Förutsättningar: Hölje och ledande struktur skiljer 60 V i potential. Båda kan beröras samtidigt.</a:t>
+              <a:t>Förutsättningar: Det är 60 V mellan höljet och konstruktionen. Båda kan röras samtidigt.</a:t>
             </a:r>
           </a:p>
         </p:txBody>
@@ -5608,7 +5465,7 @@
                 <a:ea typeface="Calibri"/>
                 <a:cs typeface="Calibri"/>
               </a:rPr>
-              <a:t>Arbetsgång: Identifiera de två kontaktpunkterna. Använd deras potentialskillnad, inte ett godtyckligt jordvärde.</a:t>
+              <a:t>Arbetsgång: Det är skillnaden mellan dem som gäller, inte spänningen mot en godtycklig jordpunkt.</a:t>
             </a:r>
           </a:p>
         </p:txBody>
@@ -5909,7 +5766,7 @@
                 <a:ea typeface="Calibri"/>
                 <a:cs typeface="Calibri"/>
               </a:rPr>
-              <a:t>Ett metallhölje ligger 60 V över en närliggande ledande struktur. En person kan beröra båda. Vilken spänning är relevant för beröringen?</a:t>
+              <a:t>Ett metallhölje ligger 60 V högre än en ledande konstruktion alldeles bredvid. En person kan röra vid båda samtidigt. Vilken spänning är det som gäller för beröringen?</a:t>
             </a:r>
           </a:p>
         </p:txBody>
@@ -6185,7 +6042,7 @@
                 <a:ea typeface="Calibri"/>
                 <a:cs typeface="Calibri"/>
               </a:rPr>
-              <a:t>I = U/R     I[mA] = 1 000 · I[A]</a:t>
+              <a:t>I = U/R; I[mA] = 1 000 · I[A]</a:t>
             </a:r>
           </a:p>
         </p:txBody>
@@ -6242,7 +6099,7 @@
                 <a:ea typeface="Calibri"/>
                 <a:cs typeface="Calibri"/>
               </a:rPr>
-              <a:t>U är spänning i V och R den antagna resistansen i Ω. Kroppens verkliga egenskaper varierar.</a:t>
+              <a:t>R är den antagna resistansen i Ω. Kroppens verkliga resistans varierar mycket.</a:t>
             </a:r>
           </a:p>
         </p:txBody>
@@ -6299,7 +6156,7 @@
                 <a:ea typeface="Calibri"/>
                 <a:cs typeface="Calibri"/>
               </a:rPr>
-              <a:t>Förutsättningar: Ren resistiv räknemodell: U = 24 V och R = 2 000 Ω. Värdet på R är ett antagande.</a:t>
+              <a:t>Förutsättningar: Förenklad räknemodell med U = 24 V och R = 2 000 Ω. Värdet på R är antaget.</a:t>
             </a:r>
           </a:p>
         </p:txBody>
@@ -6356,7 +6213,7 @@
                 <a:ea typeface="Calibri"/>
                 <a:cs typeface="Calibri"/>
               </a:rPr>
-              <a:t>Arbetsgång: Beräkna modellströmmen. Förklara varför ett antaget R inte kan fastställa en säker exponeringsgräns.</a:t>
+              <a:t>Arbetsgång: Räkna ut strömmen och förklara varför ett antaget R inte kan avgöra vad som är säkert.</a:t>
             </a:r>
           </a:p>
         </p:txBody>
@@ -6657,7 +6514,7 @@
                 <a:ea typeface="Calibri"/>
                 <a:cs typeface="Calibri"/>
               </a:rPr>
-              <a:t>En ren modell antar U = 24 V och R = 2 000 Ω. Beräkna strömmen. Varför visar svaret ingen allmän säkerhetsgräns?</a:t>
+              <a:t>I en förenklad räknemodell är U = 24 V och R = 2 000 Ω. Beräkna strömmen. Varför kan svaret inte användas som en allmän säkerhetsgräns?</a:t>
             </a:r>
           </a:p>
         </p:txBody>
@@ -7047,7 +6904,7 @@
                 <a:ea typeface="Calibri"/>
                 <a:cs typeface="Calibri"/>
               </a:rPr>
-              <a:t>Förutsättningar: Enda observationen är en släckt panel efter STOPP. Spänningslöshet har inte verifierats.</a:t>
+              <a:t>Förutsättningar: Det enda du vet är att panelen är släckt efter STOPP. Ingen har kontrollerat spänningslösheten.</a:t>
             </a:r>
           </a:p>
         </p:txBody>
@@ -7104,7 +6961,7 @@
                 <a:ea typeface="Calibri"/>
                 <a:cs typeface="Calibri"/>
               </a:rPr>
-              <a:t>Arbetsgång: Ange vad observationen faktiskt visar och vilken kontroll som ännu saknas enligt arbetsplanen.</a:t>
+              <a:t>Arbetsgång: Ange vad den släckta panelen faktiskt visar och vilken kontroll som fortfarande saknas.</a:t>
             </a:r>
           </a:p>
         </p:txBody>
@@ -7405,7 +7262,7 @@
                 <a:ea typeface="Calibri"/>
                 <a:cs typeface="Calibri"/>
               </a:rPr>
-              <a:t>Manöverpanelen är släckt efter STOPP. Varför räcker det inte som bevis för frånvaro av spänning?</a:t>
+              <a:t>Manöverpanelen är släckt efter STOPP. Varför bevisar det inte att anläggningen är spänningslös?</a:t>
             </a:r>
           </a:p>
         </p:txBody>
@@ -10059,40 +9916,7 @@
                 <a:ea typeface="Calibri"/>
                 <a:cs typeface="Calibri"/>
               </a:rPr>
-              <a:t>I</a:t>
-            </a:r>
-            <a:r>
-              <a:rPr sz="2400" b="1" baseline="-25000">
-                <a:solidFill>
-                  <a:srgbClr val="064F91"/>
-                </a:solidFill>
-                <a:latin typeface="Calibri"/>
-                <a:ea typeface="Calibri"/>
-                <a:cs typeface="Calibri"/>
-              </a:rPr>
-              <a:t>fel</a:t>
-            </a:r>
-            <a:r>
-              <a:rPr sz="2400" b="1">
-                <a:solidFill>
-                  <a:srgbClr val="064F91"/>
-                </a:solidFill>
-                <a:latin typeface="Calibri"/>
-                <a:ea typeface="Calibri"/>
-                <a:cs typeface="Calibri"/>
-              </a:rPr>
-              <a:t> ≈ U/</a:t>
-            </a:r>
-            <a:r>
-              <a:rPr sz="2400" b="1">
-                <a:solidFill>
-                  <a:srgbClr val="064F91"/>
-                </a:solidFill>
-                <a:latin typeface="Calibri"/>
-                <a:ea typeface="Calibri"/>
-                <a:cs typeface="Calibri"/>
-              </a:rPr>
-              <a:t>R</a:t>
+              <a:t>Ifel ≈ U/R</a:t>
             </a:r>
             <a:r>
               <a:rPr sz="2400" b="1" baseline="-25000">
@@ -10228,7 +10052,7 @@
                 <a:ea typeface="Calibri"/>
                 <a:cs typeface="Calibri"/>
               </a:rPr>
-              <a:t>Förutsättningar: 24 V-batteri med stor kortslutningsförmåga. Ingen total felresistans anges, så exakt ström kan inte beräknas.</a:t>
+              <a:t>Förutsättningar: Ett 24 V-batteri som kan ge stor kortslutningsström. Felkretsens resistans är inte känd, så strömmen kan inte räknas ut.</a:t>
             </a:r>
           </a:p>
         </p:txBody>
@@ -10952,7 +10776,7 @@
                 <a:ea typeface="Calibri"/>
                 <a:cs typeface="Calibri"/>
               </a:rPr>
-              <a:t>En skadad person eller föremål kan fortfarande ha kontakt med spänningssatta delar.</a:t>
+              <a:t>Den skadade eller något föremål kan fortfarande ha kontakt med spänningssatta delar.</a:t>
             </a:r>
           </a:p>
         </p:txBody>
@@ -11066,7 +10890,7 @@
                 <a:ea typeface="Calibri"/>
                 <a:cs typeface="Calibri"/>
               </a:rPr>
-              <a:t>Arbetsgång: Ange hur säkerheten för hjälparen kommer före direkt kroppskontakt. Följ larm- och räddningsinstruktioner.</a:t>
+              <a:t>Arbetsgång: Förklara varför din egen säkerhet kommer först och vad du gör innan du rör personen. Följ larm- och räddningsinstruktionerna.</a:t>
             </a:r>
           </a:p>
         </p:txBody>
@@ -11343,7 +11167,7 @@
                 <a:ea typeface="Calibri"/>
                 <a:cs typeface="Calibri"/>
               </a:rPr>
-              <a:t>En person har skadats vid en elinstallation. Platsen kan fortfarande vara spänningssatt. Vilken princip kommer före kroppskontakt med personen?</a:t>
+              <a:t>En person har skadats vid en elinstallation. Platsen kan fortfarande vara spänningssatt. Vad måste du tänka på innan du rör vid personen?</a:t>
             </a:r>
           </a:p>
         </p:txBody>
@@ -12914,7 +12738,7 @@
                 <a:ea typeface="Calibri"/>
                 <a:cs typeface="Calibri"/>
               </a:rPr>
-              <a:t>Avsaknad av personskada säger inget säkert om hur allvarlig nästa liknande händelse kan bli.</a:t>
+              <a:t>Att ingen skadades säger inget om hur illa det kan gå nästa gång.</a:t>
             </a:r>
           </a:p>
         </p:txBody>
@@ -12971,7 +12795,7 @@
                 <a:ea typeface="Calibri"/>
                 <a:cs typeface="Calibri"/>
               </a:rPr>
-              <a:t>Förutsättningar: Felansluten mätledning gav kortslutning. Ingen skadades den här gången.</a:t>
+              <a:t>Förutsättningar: En felansluten mätsladd orsakade en kortslutning. Ingen skadades den här gången.</a:t>
             </a:r>
           </a:p>
         </p:txBody>
@@ -13028,7 +12852,7 @@
                 <a:ea typeface="Calibri"/>
                 <a:cs typeface="Calibri"/>
               </a:rPr>
-              <a:t>Arbetsgång: Koppla rapportering till förebyggande åtgärder. Skilj händelsen från antaganden om personens avsikt.</a:t>
+              <a:t>Arbetsgång: Förklara hur rapporten leder till åtgärder som förebygger. Beskriv vad som hände, inte vad personen kan ha tänkt.</a:t>
             </a:r>
           </a:p>
         </p:txBody>
@@ -13305,7 +13129,7 @@
                 <a:ea typeface="Calibri"/>
                 <a:cs typeface="Calibri"/>
               </a:rPr>
-              <a:t>En felansluten mätledning skapar en kortslutning, men ingen skadas. Varför ska händelsen ändå rapporteras?</a:t>
+              <a:t>En felansluten mätsladd orsakar en kortslutning, men ingen skadas. Varför ska händelsen ändå rapporteras?</a:t>
             </a:r>
           </a:p>
         </p:txBody>
@@ -13638,7 +13462,7 @@
                 <a:ea typeface="Calibri"/>
                 <a:cs typeface="Calibri"/>
               </a:rPr>
-              <a:t>Direkt åtgärd hindrar fortsatt exponering. Förebyggande åtgärd minskar risken att bristen återkommer.</a:t>
+              <a:t>Den direkta åtgärden hindrar att någon utsätts för risken nu. Den förebyggande minskar risken att det händer igen.</a:t>
             </a:r>
           </a:p>
         </p:txBody>
@@ -13695,7 +13519,7 @@
                 <a:ea typeface="Calibri"/>
                 <a:cs typeface="Calibri"/>
               </a:rPr>
-              <a:t>Förutsättningar: Synlig skada på sladd före användning. Ingen reparation eller återgång är godkänd.</a:t>
+              <a:t>Förutsättningar: Sladden har en synlig skada och har inte använts. Den är inte reparerad eller godkänd för användning.</a:t>
             </a:r>
           </a:p>
         </p:txBody>
@@ -13752,7 +13576,7 @@
                 <a:ea typeface="Calibri"/>
                 <a:cs typeface="Calibri"/>
               </a:rPr>
-              <a:t>Arbetsgång: Ange vad som händer med utrustningen nu och hur kontrollrutinen kan förbättras.</a:t>
+              <a:t>Arbetsgång: Ange vad som görs med sladden nu och hur kontrollen före användning kan bli bättre.</a:t>
             </a:r>
           </a:p>
         </p:txBody>
@@ -14029,7 +13853,7 @@
                 <a:ea typeface="Calibri"/>
                 <a:cs typeface="Calibri"/>
               </a:rPr>
-              <a:t>En skadad sladd upptäcks före användning. Föreslå åtgärd direkt och en åtgärd som minskar risken för upprepning.</a:t>
+              <a:t>En skadad sladd upptäcks före användning. Föreslå en åtgärd direkt och en som minskar risken att det händer igen.</a:t>
             </a:r>
           </a:p>
         </p:txBody>

--- a/sjoskolan/vecka-42/aktuell/v42_01_Elektriska_risker_elev.pptx
+++ b/sjoskolan/vecka-42/aktuell/v42_01_Elektriska_risker_elev.pptx
@@ -3789,7 +3789,7 @@
                 <a:ea typeface="Calibri"/>
                 <a:cs typeface="Calibri"/>
               </a:rPr>
-              <a:t>Stöd till övning 1</a:t>
+              <a:t>Stöd till övning 1.1</a:t>
             </a:r>
           </a:p>
         </p:txBody>
@@ -4178,7 +4178,7 @@
                 <a:ea typeface="Calibri"/>
                 <a:cs typeface="Calibri"/>
               </a:rPr>
-              <a:t>Övning 1</a:t>
+              <a:t>Övning 1.1</a:t>
             </a:r>
           </a:p>
         </p:txBody>
@@ -4513,7 +4513,7 @@
                 <a:ea typeface="Calibri"/>
                 <a:cs typeface="Calibri"/>
               </a:rPr>
-              <a:t>Stöd till övning 2</a:t>
+              <a:t>Stöd till övning 1.2</a:t>
             </a:r>
           </a:p>
         </p:txBody>
@@ -4902,7 +4902,7 @@
                 <a:ea typeface="Calibri"/>
                 <a:cs typeface="Calibri"/>
               </a:rPr>
-              <a:t>Övning 2</a:t>
+              <a:t>Övning 1.2</a:t>
             </a:r>
           </a:p>
         </p:txBody>
@@ -5237,7 +5237,7 @@
                 <a:ea typeface="Calibri"/>
                 <a:cs typeface="Calibri"/>
               </a:rPr>
-              <a:t>Stöd till övning 3</a:t>
+              <a:t>Stöd till övning 1.3</a:t>
             </a:r>
           </a:p>
         </p:txBody>
@@ -5650,7 +5650,7 @@
                 <a:ea typeface="Calibri"/>
                 <a:cs typeface="Calibri"/>
               </a:rPr>
-              <a:t>Övning 3</a:t>
+              <a:t>Övning 1.3</a:t>
             </a:r>
           </a:p>
         </p:txBody>
@@ -5985,7 +5985,7 @@
                 <a:ea typeface="Calibri"/>
                 <a:cs typeface="Calibri"/>
               </a:rPr>
-              <a:t>Stöd till övning 4</a:t>
+              <a:t>Stöd till övning 1.4</a:t>
             </a:r>
           </a:p>
         </p:txBody>
@@ -6398,7 +6398,7 @@
                 <a:ea typeface="Calibri"/>
                 <a:cs typeface="Calibri"/>
               </a:rPr>
-              <a:t>Övning 4</a:t>
+              <a:t>Övning 1.4</a:t>
             </a:r>
           </a:p>
         </p:txBody>
@@ -6733,7 +6733,7 @@
                 <a:ea typeface="Calibri"/>
                 <a:cs typeface="Calibri"/>
               </a:rPr>
-              <a:t>Stöd till övning 5</a:t>
+              <a:t>Stöd till övning 1.5</a:t>
             </a:r>
           </a:p>
         </p:txBody>
@@ -7146,7 +7146,7 @@
                 <a:ea typeface="Calibri"/>
                 <a:cs typeface="Calibri"/>
               </a:rPr>
-              <a:t>Övning 5</a:t>
+              <a:t>Övning 1.5</a:t>
             </a:r>
           </a:p>
         </p:txBody>
@@ -9859,7 +9859,7 @@
                 <a:ea typeface="Calibri"/>
                 <a:cs typeface="Calibri"/>
               </a:rPr>
-              <a:t>Stöd till övning 6</a:t>
+              <a:t>Stöd till övning 1.6</a:t>
             </a:r>
           </a:p>
         </p:txBody>
@@ -10327,7 +10327,7 @@
                 <a:ea typeface="Calibri"/>
                 <a:cs typeface="Calibri"/>
               </a:rPr>
-              <a:t>Övning 6</a:t>
+              <a:t>Övning 1.6</a:t>
             </a:r>
           </a:p>
         </p:txBody>
@@ -10662,7 +10662,7 @@
                 <a:ea typeface="Calibri"/>
                 <a:cs typeface="Calibri"/>
               </a:rPr>
-              <a:t>Stöd till övning 7</a:t>
+              <a:t>Stöd till övning 1.7</a:t>
             </a:r>
           </a:p>
         </p:txBody>
@@ -11051,7 +11051,7 @@
                 <a:ea typeface="Calibri"/>
                 <a:cs typeface="Calibri"/>
               </a:rPr>
-              <a:t>Övning 7</a:t>
+              <a:t>Övning 1.7</a:t>
             </a:r>
           </a:p>
         </p:txBody>
@@ -11386,7 +11386,7 @@
                 <a:ea typeface="Calibri"/>
                 <a:cs typeface="Calibri"/>
               </a:rPr>
-              <a:t>Stöd till övning 8</a:t>
+              <a:t>Stöd till övning 1.8</a:t>
             </a:r>
           </a:p>
         </p:txBody>
@@ -12289,7 +12289,7 @@
                 <a:ea typeface="Calibri"/>
                 <a:cs typeface="Calibri"/>
               </a:rPr>
-              <a:t>Övning 8</a:t>
+              <a:t>Övning 1.8</a:t>
             </a:r>
           </a:p>
         </p:txBody>
@@ -12624,7 +12624,7 @@
                 <a:ea typeface="Calibri"/>
                 <a:cs typeface="Calibri"/>
               </a:rPr>
-              <a:t>Stöd till övning 9</a:t>
+              <a:t>Stöd till övning 1.9</a:t>
             </a:r>
           </a:p>
         </p:txBody>
@@ -13013,7 +13013,7 @@
                 <a:ea typeface="Calibri"/>
                 <a:cs typeface="Calibri"/>
               </a:rPr>
-              <a:t>Övning 9</a:t>
+              <a:t>Övning 1.9</a:t>
             </a:r>
           </a:p>
         </p:txBody>
@@ -13348,7 +13348,7 @@
                 <a:ea typeface="Calibri"/>
                 <a:cs typeface="Calibri"/>
               </a:rPr>
-              <a:t>Stöd till övning 10</a:t>
+              <a:t>Stöd till övning 1.10</a:t>
             </a:r>
           </a:p>
         </p:txBody>
@@ -13737,7 +13737,7 @@
                 <a:ea typeface="Calibri"/>
                 <a:cs typeface="Calibri"/>
               </a:rPr>
-              <a:t>Övning 10</a:t>
+              <a:t>Övning 1.10</a:t>
             </a:r>
           </a:p>
         </p:txBody>

--- a/sjoskolan/vecka-42/aktuell/v42_01_Elektriska_risker_elev.pptx
+++ b/sjoskolan/vecka-42/aktuell/v42_01_Elektriska_risker_elev.pptx
@@ -8040,7 +8040,7 @@
                 <a:ea typeface="Calibri"/>
                 <a:cs typeface="Calibri"/>
               </a:rPr>
-              <a:t>Teori och exempel följs av övning 6–10.</a:t>
+              <a:t>Teori och exempel följs av övning 1.6–1.10.</a:t>
             </a:r>
           </a:p>
           <a:p xmlns:a="http://schemas.openxmlformats.org/drawingml/2006/main">
@@ -11911,7 +11911,7 @@
                 <a:ea typeface="Calibri"/>
                 <a:cs typeface="Calibri"/>
               </a:rPr>
-              <a:t>15 min övning 1, 2, 4, 5 min återkoppling</a:t>
+              <a:t>15 min övning 1.1, 1.2 och 1.4, 5 min återkoppling</a:t>
             </a:r>
           </a:p>
         </p:txBody>
@@ -12025,7 +12025,7 @@
                 <a:ea typeface="Calibri"/>
                 <a:cs typeface="Calibri"/>
               </a:rPr>
-              <a:t>20 min teori och exempel, 15 min övning 6, 7, 8</a:t>
+              <a:t>20 min teori och exempel, 15 min övning 1.6, 1.7 och 1.8</a:t>
             </a:r>
           </a:p>
           <a:p xmlns:a="http://schemas.openxmlformats.org/drawingml/2006/main">

--- a/sjoskolan/vecka-42/aktuell/v42_01_Elektriska_risker_elev.pptx
+++ b/sjoskolan/vecka-42/aktuell/v42_01_Elektriska_risker_elev.pptx
@@ -9916,7 +9916,29 @@
                 <a:ea typeface="Calibri"/>
                 <a:cs typeface="Calibri"/>
               </a:rPr>
-              <a:t>Ifel ≈ U/R</a:t>
+              <a:t>I</a:t>
+            </a:r>
+            <a:r>
+              <a:rPr sz="2400" b="1" baseline="-25000">
+                <a:solidFill>
+                  <a:srgbClr val="064F91"/>
+                </a:solidFill>
+                <a:latin typeface="Calibri"/>
+                <a:ea typeface="Calibri"/>
+                <a:cs typeface="Calibri"/>
+              </a:rPr>
+              <a:t>fel</a:t>
+            </a:r>
+            <a:r>
+              <a:rPr sz="2400" b="1">
+                <a:solidFill>
+                  <a:srgbClr val="064F91"/>
+                </a:solidFill>
+                <a:latin typeface="Calibri"/>
+                <a:ea typeface="Calibri"/>
+                <a:cs typeface="Calibri"/>
+              </a:rPr>
+              <a:t> ≈ U/R</a:t>
             </a:r>
             <a:r>
               <a:rPr sz="2400" b="1" baseline="-25000">

--- a/sjoskolan/vecka-42/aktuell/v42_01_Elektriska_risker_elev.pptx
+++ b/sjoskolan/vecka-42/aktuell/v42_01_Elektriska_risker_elev.pptx
@@ -5294,7 +5294,29 @@
                 <a:ea typeface="Calibri"/>
                 <a:cs typeface="Calibri"/>
               </a:rPr>
-              <a:t>Uberöring = |VA − VB|</a:t>
+              <a:t>U</a:t>
+            </a:r>
+            <a:r>
+              <a:rPr sz="2400" b="1" baseline="-25000">
+                <a:solidFill>
+                  <a:srgbClr val="064F91"/>
+                </a:solidFill>
+                <a:latin typeface="Calibri"/>
+                <a:ea typeface="Calibri"/>
+                <a:cs typeface="Calibri"/>
+              </a:rPr>
+              <a:t>beröring</a:t>
+            </a:r>
+            <a:r>
+              <a:rPr sz="2400" b="1">
+                <a:solidFill>
+                  <a:srgbClr val="064F91"/>
+                </a:solidFill>
+                <a:latin typeface="Calibri"/>
+                <a:ea typeface="Calibri"/>
+                <a:cs typeface="Calibri"/>
+              </a:rPr>
+              <a:t> = |VA − VB|</a:t>
             </a:r>
           </a:p>
         </p:txBody>

--- a/sjoskolan/vecka-42/aktuell/v42_01_Elektriska_risker_elev.pptx
+++ b/sjoskolan/vecka-42/aktuell/v42_01_Elektriska_risker_elev.pptx
@@ -16424,14 +16424,14 @@
       </p:sp>
       <p:pic xmlns:a="http://schemas.openxmlformats.org/drawingml/2006/main" xmlns:r="http://schemas.openxmlformats.org/officeDocument/2006/relationships">
         <p:nvPicPr>
-          <p:cNvPr id="9" name="Figur: Metallhölje med isolationsfel och bruten" descr="Metallhölje med isolationsfel och bruten skyddsledare; en person rör höljet och står på ledande stålskrov. Beröringsspänningen är skillnaden mellan höljets och däckets potential"/>
+          <p:cNvPr id="9" name="Figur: Beröringsspänning ombord: pumpmotor på g" descr="Beröringsspänning ombord: pumpmotor på gummidämpare på stålkrovet, med isolationsfel (fasen mot höljet) och bruten skyddsledare (PE). Höljet är jordat bara via PE. En person rör höljet med handen (A) och står på däck (B); U_beröring = |V_A − V_B|"/>
           <p:cNvPicPr>
             <a:picLocks noChangeAspect="1"/>
           </p:cNvPicPr>
           <p:nvPr/>
         </p:nvPicPr>
         <p:blipFill>
-          <a:blip r:embed="rId3"/>
+          <a:blip r:embed="rId5"/>
           <a:stretch>
             <a:fillRect/>
           </a:stretch>
@@ -16439,7 +16439,7 @@
         <p:spPr>
           <a:xfrm>
             <a:off x="4892040" y="1645920"/>
-            <a:ext cx="3886200" cy="3795655"/>
+            <a:ext cx="3886200" cy="1855420"/>
           </a:xfrm>
           <a:prstGeom prst="rect">
             <a:avLst/>
@@ -16832,14 +16832,14 @@
       </p:sp>
       <p:pic xmlns:a="http://schemas.openxmlformats.org/drawingml/2006/main" xmlns:r="http://schemas.openxmlformats.org/officeDocument/2006/relationships">
         <p:nvPicPr>
-          <p:cNvPr id="9" name="Figur: Ljusbåge mellan två strömskenor med pila" descr="Ljusbåge mellan två strömskenor med pilar för värme, tryck, starkt ljus och splitter"/>
+          <p:cNvPr id="9" name="Figur: Ljusbåge mellan skenorna L1 och L2 i ett" descr="Ljusbåge mellan skenorna L1 och L2 i ett öppet ställverksfack: värme och starkt ljus, tryckvåg och splitter av smält metall; även giftiga gaser och buller. Skada utan ström genom kroppen"/>
           <p:cNvPicPr>
             <a:picLocks noChangeAspect="1"/>
           </p:cNvPicPr>
           <p:nvPr/>
         </p:nvPicPr>
         <p:blipFill>
-          <a:blip r:embed="rId3"/>
+          <a:blip r:embed="rId5"/>
           <a:stretch>
             <a:fillRect/>
           </a:stretch>
@@ -16847,7 +16847,7 @@
         <p:spPr>
           <a:xfrm>
             <a:off x="4892040" y="1645920"/>
-            <a:ext cx="3886200" cy="3252383"/>
+            <a:ext cx="3886200" cy="2378898"/>
           </a:xfrm>
           <a:prstGeom prst="rect">
             <a:avLst/>

--- a/sjoskolan/vecka-42/aktuell/v42_01_Elektriska_risker_elev.pptx
+++ b/sjoskolan/vecka-42/aktuell/v42_01_Elektriska_risker_elev.pptx
@@ -5316,7 +5316,51 @@
                 <a:ea typeface="Calibri"/>
                 <a:cs typeface="Calibri"/>
               </a:rPr>
-              <a:t> = |VA − VB|</a:t>
+              <a:t> = |V</a:t>
+            </a:r>
+            <a:r>
+              <a:rPr sz="2400" b="1" baseline="-25000">
+                <a:solidFill>
+                  <a:srgbClr val="064F91"/>
+                </a:solidFill>
+                <a:latin typeface="Calibri"/>
+                <a:ea typeface="Calibri"/>
+                <a:cs typeface="Calibri"/>
+              </a:rPr>
+              <a:t>A</a:t>
+            </a:r>
+            <a:r>
+              <a:rPr sz="2400" b="1">
+                <a:solidFill>
+                  <a:srgbClr val="064F91"/>
+                </a:solidFill>
+                <a:latin typeface="Calibri"/>
+                <a:ea typeface="Calibri"/>
+                <a:cs typeface="Calibri"/>
+              </a:rPr>
+              <a:t> − V</a:t>
+            </a:r>
+            <a:r>
+              <a:rPr sz="2400" b="1" baseline="-25000">
+                <a:solidFill>
+                  <a:srgbClr val="064F91"/>
+                </a:solidFill>
+                <a:latin typeface="Calibri"/>
+                <a:ea typeface="Calibri"/>
+                <a:cs typeface="Calibri"/>
+              </a:rPr>
+              <a:t>B</a:t>
+            </a:r>
+            <a:r>
+              <a:rPr sz="2400" b="1">
+                <a:solidFill>
+                  <a:srgbClr val="064F91"/>
+                </a:solidFill>
+                <a:latin typeface="Calibri"/>
+                <a:ea typeface="Calibri"/>
+                <a:cs typeface="Calibri"/>
+              </a:rPr>
+              <a:t>|</a:t>
             </a:r>
           </a:p>
         </p:txBody>
@@ -5373,7 +5417,51 @@
                 <a:ea typeface="Calibri"/>
                 <a:cs typeface="Calibri"/>
               </a:rPr>
-              <a:t>VA och VB är spänningen i de två punkter som kan röras samtidigt.</a:t>
+              <a:t>V</a:t>
+            </a:r>
+            <a:r>
+              <a:rPr sz="2050" b="0" baseline="-25000">
+                <a:solidFill>
+                  <a:srgbClr val="111111"/>
+                </a:solidFill>
+                <a:latin typeface="Calibri"/>
+                <a:ea typeface="Calibri"/>
+                <a:cs typeface="Calibri"/>
+              </a:rPr>
+              <a:t>A</a:t>
+            </a:r>
+            <a:r>
+              <a:rPr sz="2050" b="0">
+                <a:solidFill>
+                  <a:srgbClr val="111111"/>
+                </a:solidFill>
+                <a:latin typeface="Calibri"/>
+                <a:ea typeface="Calibri"/>
+                <a:cs typeface="Calibri"/>
+              </a:rPr>
+              <a:t> och V</a:t>
+            </a:r>
+            <a:r>
+              <a:rPr sz="2050" b="0" baseline="-25000">
+                <a:solidFill>
+                  <a:srgbClr val="111111"/>
+                </a:solidFill>
+                <a:latin typeface="Calibri"/>
+                <a:ea typeface="Calibri"/>
+                <a:cs typeface="Calibri"/>
+              </a:rPr>
+              <a:t>B</a:t>
+            </a:r>
+            <a:r>
+              <a:rPr sz="2050" b="0">
+                <a:solidFill>
+                  <a:srgbClr val="111111"/>
+                </a:solidFill>
+                <a:latin typeface="Calibri"/>
+                <a:ea typeface="Calibri"/>
+                <a:cs typeface="Calibri"/>
+              </a:rPr>
+              <a:t> är potentialen i punkterna A och B, mätt mot samma referens, till exempel skrovet.</a:t>
             </a:r>
           </a:p>
         </p:txBody>
@@ -6306,7 +6394,7 @@
           <p:nvPr/>
         </p:nvPicPr>
         <p:blipFill>
-          <a:blip r:embed="rId3"/>
+          <a:blip r:embed="rId4"/>
           <a:stretch>
             <a:fillRect/>
           </a:stretch>
@@ -9504,7 +9592,7 @@
                 <a:ea typeface="Calibri"/>
                 <a:cs typeface="Calibri"/>
               </a:rPr>
-              <a:t>En skadad prob upptäcks före användning. Mätningen har ännu inte påbörjats.</a:t>
+              <a:t>Ett låsbleck för frånskiljaren är böjt och går inte att stänga. Det upptäcks innan arbetet börjar.</a:t>
             </a:r>
           </a:p>
         </p:txBody>
@@ -9618,7 +9706,7 @@
                 <a:ea typeface="Calibri"/>
                 <a:cs typeface="Calibri"/>
               </a:rPr>
-              <a:t>1. Ta den skadade proben ur bruk och märk enligt rutinen.</a:t>
+              <a:t>1. Ta det böjda låsblecket ur bruk och märk det enligt rutinen.</a:t>
             </a:r>
           </a:p>
           <a:p xmlns:a="http://schemas.openxmlformats.org/drawingml/2006/main">
@@ -9641,7 +9729,7 @@
                 <a:ea typeface="Calibri"/>
                 <a:cs typeface="Calibri"/>
               </a:rPr>
-              <a:t>2. Ordna avsedd, kontrollerad utrustning innan mätningen.</a:t>
+              <a:t>2. Hämta ett helt låsbleck innan frånskiljaren låses.</a:t>
             </a:r>
           </a:p>
           <a:p xmlns:a="http://schemas.openxmlformats.org/drawingml/2006/main">
@@ -9664,7 +9752,7 @@
                 <a:ea typeface="Calibri"/>
                 <a:cs typeface="Calibri"/>
               </a:rPr>
-              <a:t>3. Följ upp hur skadan uppstod och hur förkontrollen fungerar.</a:t>
+              <a:t>3. Följ upp hur skadan uppstod och om låsutrustningen kontrolleras före användning.</a:t>
             </a:r>
           </a:p>
         </p:txBody>
@@ -10487,7 +10575,7 @@
                 <a:ea typeface="Calibri"/>
                 <a:cs typeface="Calibri"/>
               </a:rPr>
-              <a:t>Ett 24 V-batteri har stor kortslutningsförmåga. Ange en viktig risk som inte avgörs av spänningstalet ensamt.</a:t>
+              <a:t>Ett 24 V-batteri kan ge en mycket stor ström om polerna kortsluts. Vilken risk finns, fast spänningen är låg?</a:t>
             </a:r>
           </a:p>
         </p:txBody>
@@ -17001,15 +17089,15 @@
               </a:defRPr>
             </a:pPr>
             <a:r>
-              <a:rPr sz="2100" b="0">
-                <a:solidFill>
-                  <a:srgbClr val="111111"/>
-                </a:solidFill>
-                <a:latin typeface="Calibri"/>
-                <a:ea typeface="Calibri"/>
-                <a:cs typeface="Calibri"/>
-              </a:rPr>
-              <a:t>En skadad skarvkabel ligger där vatten samlas. Ingen berör den just nu.</a:t>
+              <a:rPr sz="1800" b="0">
+                <a:solidFill>
+                  <a:srgbClr val="111111"/>
+                </a:solidFill>
+                <a:latin typeface="Calibri"/>
+                <a:ea typeface="Calibri"/>
+                <a:cs typeface="Calibri"/>
+              </a:rPr>
+              <a:t>En vinkelslip i verkstaden har en kabel som legat klämd under en tung låda. Ingen använder maskinen just nu.</a:t>
             </a:r>
           </a:p>
         </p:txBody>
@@ -17115,15 +17203,15 @@
               </a:defRPr>
             </a:pPr>
             <a:r>
-              <a:rPr sz="1650" b="0">
-                <a:solidFill>
-                  <a:srgbClr val="111111"/>
-                </a:solidFill>
-                <a:latin typeface="Calibri"/>
-                <a:ea typeface="Calibri"/>
-                <a:cs typeface="Calibri"/>
-              </a:rPr>
-              <a:t>1. Observation: synlig kabelskada och vatten i området.</a:t>
+              <a:rPr sz="1500" b="0">
+                <a:solidFill>
+                  <a:srgbClr val="111111"/>
+                </a:solidFill>
+                <a:latin typeface="Calibri"/>
+                <a:ea typeface="Calibri"/>
+                <a:cs typeface="Calibri"/>
+              </a:rPr>
+              <a:t>1. Observation: kabeln är tillplattad och manteln har en spricka.</a:t>
             </a:r>
           </a:p>
           <a:p xmlns:a="http://schemas.openxmlformats.org/drawingml/2006/main">
@@ -17138,15 +17226,15 @@
               </a:defRPr>
             </a:pPr>
             <a:r>
-              <a:rPr sz="1650" b="0">
-                <a:solidFill>
-                  <a:srgbClr val="111111"/>
-                </a:solidFill>
-                <a:latin typeface="Calibri"/>
-                <a:ea typeface="Calibri"/>
-                <a:cs typeface="Calibri"/>
-              </a:rPr>
-              <a:t>2. Möjlig händelse: en person berör en del vars isolation brustit.</a:t>
+              <a:rPr sz="1500" b="0">
+                <a:solidFill>
+                  <a:srgbClr val="111111"/>
+                </a:solidFill>
+                <a:latin typeface="Calibri"/>
+                <a:ea typeface="Calibri"/>
+                <a:cs typeface="Calibri"/>
+              </a:rPr>
+              <a:t>2. Möjlig händelse: någon håller i maskinen och rör en del där isolationen är trasig.</a:t>
             </a:r>
           </a:p>
           <a:p xmlns:a="http://schemas.openxmlformats.org/drawingml/2006/main">
@@ -17161,15 +17249,15 @@
               </a:defRPr>
             </a:pPr>
             <a:r>
-              <a:rPr sz="1650" b="0">
-                <a:solidFill>
-                  <a:srgbClr val="111111"/>
-                </a:solidFill>
-                <a:latin typeface="Calibri"/>
-                <a:ea typeface="Calibri"/>
-                <a:cs typeface="Calibri"/>
-              </a:rPr>
-              <a:t>3. Möjlig följd: strömgenomgång eller fallskada.</a:t>
+              <a:rPr sz="1500" b="0">
+                <a:solidFill>
+                  <a:srgbClr val="111111"/>
+                </a:solidFill>
+                <a:latin typeface="Calibri"/>
+                <a:ea typeface="Calibri"/>
+                <a:cs typeface="Calibri"/>
+              </a:rPr>
+              <a:t>3. Möjlig följd: strömgenomgång, eller att personen tappar maskinen och skadar sig.</a:t>
             </a:r>
           </a:p>
         </p:txBody>
@@ -17218,15 +17306,15 @@
               </a:defRPr>
             </a:pPr>
             <a:r>
-              <a:rPr sz="1550" b="0">
-                <a:solidFill>
-                  <a:srgbClr val="111111"/>
-                </a:solidFill>
-                <a:latin typeface="Calibri"/>
-                <a:ea typeface="Calibri"/>
-                <a:cs typeface="Calibri"/>
-              </a:rPr>
-              <a:t>Spänningssättning är ännu inte verifierad. Den synliga skadan räcker för att stoppa användningen.</a:t>
+              <a:rPr sz="1400" b="0">
+                <a:solidFill>
+                  <a:srgbClr val="111111"/>
+                </a:solidFill>
+                <a:latin typeface="Calibri"/>
+                <a:ea typeface="Calibri"/>
+                <a:cs typeface="Calibri"/>
+              </a:rPr>
+              <a:t>Ingen vet om kabeln är spänningssatt. Den synliga skadan räcker för att stoppa användningen.</a:t>
             </a:r>
           </a:p>
         </p:txBody>
@@ -17290,14 +17378,14 @@
       </p:sp>
       <p:pic xmlns:a="http://schemas.openxmlformats.org/drawingml/2006/main" xmlns:r="http://schemas.openxmlformats.org/officeDocument/2006/relationships">
         <p:nvPicPr>
-          <p:cNvPr id="16" name="Figur: Skadad skarvkabel i vatten på däck, avsp" descr="Skadad skarvkabel i vatten på däck, avspärrad med band"/>
+          <p:cNvPr id="16" name="Figur: Vinkelslip på en arbetsbänk vars kabel h" descr="Vinkelslip på en arbetsbänk vars kabel har legat klämd under en tung låda: kabeln är tillplattad och manteln har en spricka; maskinen används inte tills vidare beslut"/>
           <p:cNvPicPr>
             <a:picLocks noChangeAspect="1"/>
           </p:cNvPicPr>
           <p:nvPr/>
         </p:nvPicPr>
         <p:blipFill>
-          <a:blip r:embed="rId3"/>
+          <a:blip r:embed="rId4"/>
           <a:stretch>
             <a:fillRect/>
           </a:stretch>

--- a/sjoskolan/vecka-42/aktuell/v42_01_Elektriska_risker_elev.pptx
+++ b/sjoskolan/vecka-42/aktuell/v42_01_Elektriska_risker_elev.pptx
@@ -3508,7 +3508,7 @@
           <a:p>
             <a:pPr algn="l">
               <a:lnSpc>
-                <a:spcPct val="108000"/>
+                <a:spcPct val="95000"/>
               </a:lnSpc>
               <a:spcAft>
                 <a:spcPts val="0"/>
@@ -8141,7 +8141,7 @@
         <p:spPr>
           <a:xfrm>
             <a:off x="548640" y="1463040"/>
-            <a:ext cx="8046720" cy="411480"/>
+            <a:ext cx="8046720" cy="384048"/>
           </a:xfrm>
           <a:prstGeom prst="rect">
             <a:avLst/>
@@ -8184,7 +8184,7 @@
         <p:spPr>
           <a:xfrm>
             <a:off x="548640" y="1920240"/>
-            <a:ext cx="8046720" cy="411480"/>
+            <a:ext cx="8046720" cy="384048"/>
           </a:xfrm>
           <a:prstGeom prst="rect">
             <a:avLst/>
@@ -8226,7 +8226,7 @@
         <p:spPr>
           <a:xfrm>
             <a:off x="548640" y="2377440"/>
-            <a:ext cx="8046720" cy="411480"/>
+            <a:ext cx="8046720" cy="384048"/>
           </a:xfrm>
           <a:prstGeom prst="rect">
             <a:avLst/>
@@ -8269,7 +8269,7 @@
         <p:spPr>
           <a:xfrm>
             <a:off x="548640" y="2834640"/>
-            <a:ext cx="8046720" cy="411480"/>
+            <a:ext cx="8046720" cy="384048"/>
           </a:xfrm>
           <a:prstGeom prst="rect">
             <a:avLst/>
@@ -8312,7 +8312,7 @@
         <p:spPr>
           <a:xfrm>
             <a:off x="548640" y="3291840"/>
-            <a:ext cx="8046720" cy="411480"/>
+            <a:ext cx="8046720" cy="384048"/>
           </a:xfrm>
           <a:prstGeom prst="rect">
             <a:avLst/>

--- a/sjoskolan/vecka-42/aktuell/v42_01_Elektriska_risker_elev.pptx
+++ b/sjoskolan/vecka-42/aktuell/v42_01_Elektriska_risker_elev.pptx
@@ -3652,9 +3652,64 @@
           </a:p>
         </p:txBody>
       </p:sp>
+      <p:sp>
+        <p:nvSpPr>
+          <p:cNvPr id="8" name="Dag: Måndag 12 oktober"/>
+          <p:cNvSpPr/>
+          <p:nvPr/>
+        </p:nvSpPr>
+        <p:spPr>
+          <a:xfrm>
+            <a:off x="548640" y="411480"/>
+            <a:ext cx="2944368" cy="438912"/>
+          </a:xfrm>
+          <a:prstGeom prst="roundRect">
+            <a:avLst>
+              <a:gd name="adj" fmla="val 18000"/>
+            </a:avLst>
+          </a:prstGeom>
+          <a:solidFill>
+            <a:srgbClr val="008300"/>
+          </a:solidFill>
+          <a:ln>
+            <a:noFill/>
+          </a:ln>
+          <a:effectLst/>
+        </p:spPr>
+        <p:style>
+          <a:lnRef idx="1">
+            <a:schemeClr val="accent1"/>
+          </a:lnRef>
+          <a:fillRef idx="3">
+            <a:schemeClr val="accent1"/>
+          </a:fillRef>
+          <a:effectRef idx="2">
+            <a:schemeClr val="accent1"/>
+          </a:effectRef>
+          <a:fontRef idx="minor">
+            <a:schemeClr val="lt1"/>
+          </a:fontRef>
+        </p:style>
+        <p:txBody>
+          <a:bodyPr rtlCol="0" anchor="ctr" lIns="109728" rIns="109728"/>
+          <a:lstStyle/>
+          <a:p>
+            <a:pPr algn="ctr"/>
+            <a:r>
+              <a:rPr sz="1800" b="1" i="0">
+                <a:solidFill>
+                  <a:srgbClr val="FFFFFF"/>
+                </a:solidFill>
+                <a:latin typeface="Calibri"/>
+              </a:rPr>
+              <a:t>Måndag 12 oktober</a:t>
+            </a:r>
+          </a:p>
+        </p:txBody>
+      </p:sp>
       <p:pic>
         <p:nvPicPr>
-          <p:cNvPr id="8" name="Picture 7" descr="sidfot.jpg"/>
+          <p:cNvPr id="9" name="Picture 8" descr="sidfot.jpg"/>
           <p:cNvPicPr>
             <a:picLocks noChangeAspect="1"/>
           </p:cNvPicPr>
@@ -3678,7 +3733,7 @@
       </p:pic>
       <p:sp>
         <p:nvSpPr>
-          <p:cNvPr id="9" name="TextBox 8"/>
+          <p:cNvPr id="10" name="TextBox 9"/>
           <p:cNvSpPr txBox="1"/>
           <p:nvPr/>
         </p:nvSpPr>
@@ -3720,7 +3775,7 @@
       </p:sp>
       <p:sp>
         <p:nvSpPr>
-          <p:cNvPr id="10" name="TextBox 9"/>
+          <p:cNvPr id="11" name="TextBox 10"/>
           <p:cNvSpPr txBox="1"/>
           <p:nvPr/>
         </p:nvSpPr>
@@ -7393,7 +7448,7 @@
                 </a:solidFill>
                 <a:latin typeface="Calibri"/>
               </a:rPr>
-              <a:t>1. Läs del 1 på webben. Tryck på ”Jag har läst del 1” längst ned på sidan.</a:t>
+              <a:t>1. Läs del 1. Tryck på ”Jag har läst del 1” längst ned på sidan.</a:t>
             </a:r>
           </a:p>
           <a:p>
@@ -7450,7 +7505,26 @@
                 </a:solidFill>
                 <a:latin typeface="Calibri"/>
               </a:rPr>
-              <a:t>4. I morgon tisdag 15.00: del 2, Regler, ansvar och arbetsmetoder.</a:t>
+              <a:t>4. Börja läsa de fyra texterna till Läsförståelse.</a:t>
+            </a:r>
+          </a:p>
+          <a:p>
+            <a:pPr algn="l">
+              <a:lnSpc>
+                <a:spcPct val="108000"/>
+              </a:lnSpc>
+              <a:spcAft>
+                <a:spcPts val="1400"/>
+              </a:spcAft>
+            </a:pPr>
+            <a:r>
+              <a:rPr sz="2000" b="0" i="0">
+                <a:solidFill>
+                  <a:srgbClr val="111111"/>
+                </a:solidFill>
+                <a:latin typeface="Calibri"/>
+              </a:rPr>
+              <a:t>5. I morgon tisdag 15.00: del 2, Regler, ansvar och arbetsmetoder.</a:t>
             </a:r>
           </a:p>
           <a:p>
@@ -7469,7 +7543,7 @@
                 </a:solidFill>
                 <a:latin typeface="Calibri"/>
               </a:rPr>
-              <a:t>Inlämningen för vecka 42 öppnar du från veckosidan. Sista dag: söndag 18 oktober.</a:t>
+              <a:t>Läsförståelsen senast torsdag 15 oktober, inlämningen senast söndag 18 oktober. Båda öppnar du från veckosidan.</a:t>
             </a:r>
           </a:p>
         </p:txBody>

--- a/sjoskolan/vecka-42/aktuell/v42_01_Elektriska_risker_elev.pptx
+++ b/sjoskolan/vecka-42/aktuell/v42_01_Elektriska_risker_elev.pptx
@@ -7505,7 +7505,7 @@
                 </a:solidFill>
                 <a:latin typeface="Calibri"/>
               </a:rPr>
-              <a:t>4. Börja läsa de fyra texterna till Läsförståelse.</a:t>
+              <a:t>4. Börja läsa de fyra texterna till veckans quiz.</a:t>
             </a:r>
           </a:p>
           <a:p>
@@ -7543,7 +7543,7 @@
                 </a:solidFill>
                 <a:latin typeface="Calibri"/>
               </a:rPr>
-              <a:t>Läsförståelsen senast torsdag 15 oktober, inlämningen senast söndag 18 oktober. Båda öppnar du från veckosidan.</a:t>
+              <a:t>Quizet senast torsdag 15 oktober, inlämningen senast söndag 18 oktober. Båda öppnar du från veckosidan.</a:t>
             </a:r>
           </a:p>
         </p:txBody>

--- a/sjoskolan/vecka-42/aktuell/v42_01_Elektriska_risker_elev.pptx
+++ b/sjoskolan/vecka-42/aktuell/v42_01_Elektriska_risker_elev.pptx
@@ -7505,7 +7505,7 @@
                 </a:solidFill>
                 <a:latin typeface="Calibri"/>
               </a:rPr>
-              <a:t>4. Börja läsa de fyra texterna till veckans quiz.</a:t>
+              <a:t>4. Veckans läxa: läs de fyra texterna från Transportstyrelsen.</a:t>
             </a:r>
           </a:p>
           <a:p>
@@ -7543,7 +7543,7 @@
                 </a:solidFill>
                 <a:latin typeface="Calibri"/>
               </a:rPr>
-              <a:t>Quizet senast torsdag 15 oktober, inlämningen senast söndag 18 oktober. Båda öppnar du från veckosidan.</a:t>
+              <a:t>Läs texterna och gör quizet senast torsdag 15 oktober. Inlämningen senast fredag 16 oktober. Allt finns på veckosidan.</a:t>
             </a:r>
           </a:p>
         </p:txBody>
